--- a/耶穌基督是主_小羊詩歌.pptx
+++ b/耶穌基督是主_小羊詩歌.pptx
@@ -160,7 +160,7 @@
           <a:lstStyle/>
           <a:p>
             <a:r>
-              <a:rPr lang="en-US" altLang="zh-TW" smtClean="0"/>
+              <a:rPr lang="en-US" altLang="zh-TW"/>
               <a:t>Click to edit Master title style</a:t>
             </a:r>
             <a:endParaRPr lang="zh-TW" altLang="en-US"/>
@@ -279,7 +279,7 @@
           </a:lstStyle>
           <a:p>
             <a:r>
-              <a:rPr lang="en-US" altLang="zh-TW" smtClean="0"/>
+              <a:rPr lang="en-US" altLang="zh-TW"/>
               <a:t>Click to edit Master subtitle style</a:t>
             </a:r>
             <a:endParaRPr lang="zh-TW" altLang="en-US"/>
@@ -303,7 +303,7 @@
           <a:p>
             <a:fld id="{73FD648D-8B53-4CD8-850C-5D4A2D6A8C55}" type="datetimeFigureOut">
               <a:rPr lang="vi-VN" smtClean="0"/>
-              <a:t>15/04/2023</a:t>
+              <a:t>12/04/2025</a:t>
             </a:fld>
             <a:endParaRPr lang="vi-VN"/>
           </a:p>
@@ -397,7 +397,7 @@
           <a:lstStyle/>
           <a:p>
             <a:r>
-              <a:rPr lang="en-US" altLang="zh-TW" smtClean="0"/>
+              <a:rPr lang="en-US" altLang="zh-TW"/>
               <a:t>Click to edit Master title style</a:t>
             </a:r>
             <a:endParaRPr lang="zh-TW" altLang="en-US"/>
@@ -421,35 +421,35 @@
           <a:p>
             <a:pPr lvl="0"/>
             <a:r>
-              <a:rPr lang="en-US" altLang="zh-TW" smtClean="0"/>
+              <a:rPr lang="en-US" altLang="zh-TW"/>
               <a:t>Edit Master text styles</a:t>
             </a:r>
           </a:p>
           <a:p>
             <a:pPr lvl="1"/>
             <a:r>
-              <a:rPr lang="en-US" altLang="zh-TW" smtClean="0"/>
+              <a:rPr lang="en-US" altLang="zh-TW"/>
               <a:t>Second level</a:t>
             </a:r>
           </a:p>
           <a:p>
             <a:pPr lvl="2"/>
             <a:r>
-              <a:rPr lang="en-US" altLang="zh-TW" smtClean="0"/>
+              <a:rPr lang="en-US" altLang="zh-TW"/>
               <a:t>Third level</a:t>
             </a:r>
           </a:p>
           <a:p>
             <a:pPr lvl="3"/>
             <a:r>
-              <a:rPr lang="en-US" altLang="zh-TW" smtClean="0"/>
+              <a:rPr lang="en-US" altLang="zh-TW"/>
               <a:t>Fourth level</a:t>
             </a:r>
           </a:p>
           <a:p>
             <a:pPr lvl="4"/>
             <a:r>
-              <a:rPr lang="en-US" altLang="zh-TW" smtClean="0"/>
+              <a:rPr lang="en-US" altLang="zh-TW"/>
               <a:t>Fifth level</a:t>
             </a:r>
             <a:endParaRPr lang="zh-TW" altLang="en-US"/>
@@ -473,7 +473,7 @@
           <a:p>
             <a:fld id="{73FD648D-8B53-4CD8-850C-5D4A2D6A8C55}" type="datetimeFigureOut">
               <a:rPr lang="vi-VN" smtClean="0"/>
-              <a:t>15/04/2023</a:t>
+              <a:t>12/04/2025</a:t>
             </a:fld>
             <a:endParaRPr lang="vi-VN"/>
           </a:p>
@@ -572,7 +572,7 @@
           <a:lstStyle/>
           <a:p>
             <a:r>
-              <a:rPr lang="en-US" altLang="zh-TW" smtClean="0"/>
+              <a:rPr lang="en-US" altLang="zh-TW"/>
               <a:t>Click to edit Master title style</a:t>
             </a:r>
             <a:endParaRPr lang="zh-TW" altLang="en-US"/>
@@ -601,35 +601,35 @@
           <a:p>
             <a:pPr lvl="0"/>
             <a:r>
-              <a:rPr lang="en-US" altLang="zh-TW" smtClean="0"/>
+              <a:rPr lang="en-US" altLang="zh-TW"/>
               <a:t>Edit Master text styles</a:t>
             </a:r>
           </a:p>
           <a:p>
             <a:pPr lvl="1"/>
             <a:r>
-              <a:rPr lang="en-US" altLang="zh-TW" smtClean="0"/>
+              <a:rPr lang="en-US" altLang="zh-TW"/>
               <a:t>Second level</a:t>
             </a:r>
           </a:p>
           <a:p>
             <a:pPr lvl="2"/>
             <a:r>
-              <a:rPr lang="en-US" altLang="zh-TW" smtClean="0"/>
+              <a:rPr lang="en-US" altLang="zh-TW"/>
               <a:t>Third level</a:t>
             </a:r>
           </a:p>
           <a:p>
             <a:pPr lvl="3"/>
             <a:r>
-              <a:rPr lang="en-US" altLang="zh-TW" smtClean="0"/>
+              <a:rPr lang="en-US" altLang="zh-TW"/>
               <a:t>Fourth level</a:t>
             </a:r>
           </a:p>
           <a:p>
             <a:pPr lvl="4"/>
             <a:r>
-              <a:rPr lang="en-US" altLang="zh-TW" smtClean="0"/>
+              <a:rPr lang="en-US" altLang="zh-TW"/>
               <a:t>Fifth level</a:t>
             </a:r>
             <a:endParaRPr lang="zh-TW" altLang="en-US"/>
@@ -653,7 +653,7 @@
           <a:p>
             <a:fld id="{73FD648D-8B53-4CD8-850C-5D4A2D6A8C55}" type="datetimeFigureOut">
               <a:rPr lang="vi-VN" smtClean="0"/>
-              <a:t>15/04/2023</a:t>
+              <a:t>12/04/2025</a:t>
             </a:fld>
             <a:endParaRPr lang="vi-VN"/>
           </a:p>
@@ -747,7 +747,7 @@
           <a:lstStyle/>
           <a:p>
             <a:r>
-              <a:rPr lang="en-US" altLang="zh-TW" smtClean="0"/>
+              <a:rPr lang="en-US" altLang="zh-TW"/>
               <a:t>Click to edit Master title style</a:t>
             </a:r>
             <a:endParaRPr lang="zh-TW" altLang="en-US"/>
@@ -771,35 +771,35 @@
           <a:p>
             <a:pPr lvl="0"/>
             <a:r>
-              <a:rPr lang="en-US" altLang="zh-TW" smtClean="0"/>
+              <a:rPr lang="en-US" altLang="zh-TW"/>
               <a:t>Edit Master text styles</a:t>
             </a:r>
           </a:p>
           <a:p>
             <a:pPr lvl="1"/>
             <a:r>
-              <a:rPr lang="en-US" altLang="zh-TW" smtClean="0"/>
+              <a:rPr lang="en-US" altLang="zh-TW"/>
               <a:t>Second level</a:t>
             </a:r>
           </a:p>
           <a:p>
             <a:pPr lvl="2"/>
             <a:r>
-              <a:rPr lang="en-US" altLang="zh-TW" smtClean="0"/>
+              <a:rPr lang="en-US" altLang="zh-TW"/>
               <a:t>Third level</a:t>
             </a:r>
           </a:p>
           <a:p>
             <a:pPr lvl="3"/>
             <a:r>
-              <a:rPr lang="en-US" altLang="zh-TW" smtClean="0"/>
+              <a:rPr lang="en-US" altLang="zh-TW"/>
               <a:t>Fourth level</a:t>
             </a:r>
           </a:p>
           <a:p>
             <a:pPr lvl="4"/>
             <a:r>
-              <a:rPr lang="en-US" altLang="zh-TW" smtClean="0"/>
+              <a:rPr lang="en-US" altLang="zh-TW"/>
               <a:t>Fifth level</a:t>
             </a:r>
             <a:endParaRPr lang="zh-TW" altLang="en-US"/>
@@ -823,7 +823,7 @@
           <a:p>
             <a:fld id="{73FD648D-8B53-4CD8-850C-5D4A2D6A8C55}" type="datetimeFigureOut">
               <a:rPr lang="vi-VN" smtClean="0"/>
-              <a:t>15/04/2023</a:t>
+              <a:t>12/04/2025</a:t>
             </a:fld>
             <a:endParaRPr lang="vi-VN"/>
           </a:p>
@@ -926,7 +926,7 @@
           </a:lstStyle>
           <a:p>
             <a:r>
-              <a:rPr lang="en-US" altLang="zh-TW" smtClean="0"/>
+              <a:rPr lang="en-US" altLang="zh-TW"/>
               <a:t>Click to edit Master title style</a:t>
             </a:r>
             <a:endParaRPr lang="zh-TW" altLang="en-US"/>
@@ -1046,7 +1046,7 @@
           <a:p>
             <a:pPr lvl="0"/>
             <a:r>
-              <a:rPr lang="en-US" altLang="zh-TW" smtClean="0"/>
+              <a:rPr lang="en-US" altLang="zh-TW"/>
               <a:t>Edit Master text styles</a:t>
             </a:r>
           </a:p>
@@ -1069,7 +1069,7 @@
           <a:p>
             <a:fld id="{73FD648D-8B53-4CD8-850C-5D4A2D6A8C55}" type="datetimeFigureOut">
               <a:rPr lang="vi-VN" smtClean="0"/>
-              <a:t>15/04/2023</a:t>
+              <a:t>12/04/2025</a:t>
             </a:fld>
             <a:endParaRPr lang="vi-VN"/>
           </a:p>
@@ -1163,7 +1163,7 @@
           <a:lstStyle/>
           <a:p>
             <a:r>
-              <a:rPr lang="en-US" altLang="zh-TW" smtClean="0"/>
+              <a:rPr lang="en-US" altLang="zh-TW"/>
               <a:t>Click to edit Master title style</a:t>
             </a:r>
             <a:endParaRPr lang="zh-TW" altLang="en-US"/>
@@ -1220,35 +1220,35 @@
           <a:p>
             <a:pPr lvl="0"/>
             <a:r>
-              <a:rPr lang="en-US" altLang="zh-TW" smtClean="0"/>
+              <a:rPr lang="en-US" altLang="zh-TW"/>
               <a:t>Edit Master text styles</a:t>
             </a:r>
           </a:p>
           <a:p>
             <a:pPr lvl="1"/>
             <a:r>
-              <a:rPr lang="en-US" altLang="zh-TW" smtClean="0"/>
+              <a:rPr lang="en-US" altLang="zh-TW"/>
               <a:t>Second level</a:t>
             </a:r>
           </a:p>
           <a:p>
             <a:pPr lvl="2"/>
             <a:r>
-              <a:rPr lang="en-US" altLang="zh-TW" smtClean="0"/>
+              <a:rPr lang="en-US" altLang="zh-TW"/>
               <a:t>Third level</a:t>
             </a:r>
           </a:p>
           <a:p>
             <a:pPr lvl="3"/>
             <a:r>
-              <a:rPr lang="en-US" altLang="zh-TW" smtClean="0"/>
+              <a:rPr lang="en-US" altLang="zh-TW"/>
               <a:t>Fourth level</a:t>
             </a:r>
           </a:p>
           <a:p>
             <a:pPr lvl="4"/>
             <a:r>
-              <a:rPr lang="en-US" altLang="zh-TW" smtClean="0"/>
+              <a:rPr lang="en-US" altLang="zh-TW"/>
               <a:t>Fifth level</a:t>
             </a:r>
             <a:endParaRPr lang="zh-TW" altLang="en-US"/>
@@ -1305,35 +1305,35 @@
           <a:p>
             <a:pPr lvl="0"/>
             <a:r>
-              <a:rPr lang="en-US" altLang="zh-TW" smtClean="0"/>
+              <a:rPr lang="en-US" altLang="zh-TW"/>
               <a:t>Edit Master text styles</a:t>
             </a:r>
           </a:p>
           <a:p>
             <a:pPr lvl="1"/>
             <a:r>
-              <a:rPr lang="en-US" altLang="zh-TW" smtClean="0"/>
+              <a:rPr lang="en-US" altLang="zh-TW"/>
               <a:t>Second level</a:t>
             </a:r>
           </a:p>
           <a:p>
             <a:pPr lvl="2"/>
             <a:r>
-              <a:rPr lang="en-US" altLang="zh-TW" smtClean="0"/>
+              <a:rPr lang="en-US" altLang="zh-TW"/>
               <a:t>Third level</a:t>
             </a:r>
           </a:p>
           <a:p>
             <a:pPr lvl="3"/>
             <a:r>
-              <a:rPr lang="en-US" altLang="zh-TW" smtClean="0"/>
+              <a:rPr lang="en-US" altLang="zh-TW"/>
               <a:t>Fourth level</a:t>
             </a:r>
           </a:p>
           <a:p>
             <a:pPr lvl="4"/>
             <a:r>
-              <a:rPr lang="en-US" altLang="zh-TW" smtClean="0"/>
+              <a:rPr lang="en-US" altLang="zh-TW"/>
               <a:t>Fifth level</a:t>
             </a:r>
             <a:endParaRPr lang="zh-TW" altLang="en-US"/>
@@ -1357,7 +1357,7 @@
           <a:p>
             <a:fld id="{73FD648D-8B53-4CD8-850C-5D4A2D6A8C55}" type="datetimeFigureOut">
               <a:rPr lang="vi-VN" smtClean="0"/>
-              <a:t>15/04/2023</a:t>
+              <a:t>12/04/2025</a:t>
             </a:fld>
             <a:endParaRPr lang="vi-VN"/>
           </a:p>
@@ -1455,7 +1455,7 @@
           </a:lstStyle>
           <a:p>
             <a:r>
-              <a:rPr lang="en-US" altLang="zh-TW" smtClean="0"/>
+              <a:rPr lang="en-US" altLang="zh-TW"/>
               <a:t>Click to edit Master title style</a:t>
             </a:r>
             <a:endParaRPr lang="zh-TW" altLang="en-US"/>
@@ -1521,7 +1521,7 @@
           <a:p>
             <a:pPr lvl="0"/>
             <a:r>
-              <a:rPr lang="en-US" altLang="zh-TW" smtClean="0"/>
+              <a:rPr lang="en-US" altLang="zh-TW"/>
               <a:t>Edit Master text styles</a:t>
             </a:r>
           </a:p>
@@ -1577,35 +1577,35 @@
           <a:p>
             <a:pPr lvl="0"/>
             <a:r>
-              <a:rPr lang="en-US" altLang="zh-TW" smtClean="0"/>
+              <a:rPr lang="en-US" altLang="zh-TW"/>
               <a:t>Edit Master text styles</a:t>
             </a:r>
           </a:p>
           <a:p>
             <a:pPr lvl="1"/>
             <a:r>
-              <a:rPr lang="en-US" altLang="zh-TW" smtClean="0"/>
+              <a:rPr lang="en-US" altLang="zh-TW"/>
               <a:t>Second level</a:t>
             </a:r>
           </a:p>
           <a:p>
             <a:pPr lvl="2"/>
             <a:r>
-              <a:rPr lang="en-US" altLang="zh-TW" smtClean="0"/>
+              <a:rPr lang="en-US" altLang="zh-TW"/>
               <a:t>Third level</a:t>
             </a:r>
           </a:p>
           <a:p>
             <a:pPr lvl="3"/>
             <a:r>
-              <a:rPr lang="en-US" altLang="zh-TW" smtClean="0"/>
+              <a:rPr lang="en-US" altLang="zh-TW"/>
               <a:t>Fourth level</a:t>
             </a:r>
           </a:p>
           <a:p>
             <a:pPr lvl="4"/>
             <a:r>
-              <a:rPr lang="en-US" altLang="zh-TW" smtClean="0"/>
+              <a:rPr lang="en-US" altLang="zh-TW"/>
               <a:t>Fifth level</a:t>
             </a:r>
             <a:endParaRPr lang="zh-TW" altLang="en-US"/>
@@ -1671,7 +1671,7 @@
           <a:p>
             <a:pPr lvl="0"/>
             <a:r>
-              <a:rPr lang="en-US" altLang="zh-TW" smtClean="0"/>
+              <a:rPr lang="en-US" altLang="zh-TW"/>
               <a:t>Edit Master text styles</a:t>
             </a:r>
           </a:p>
@@ -1727,35 +1727,35 @@
           <a:p>
             <a:pPr lvl="0"/>
             <a:r>
-              <a:rPr lang="en-US" altLang="zh-TW" smtClean="0"/>
+              <a:rPr lang="en-US" altLang="zh-TW"/>
               <a:t>Edit Master text styles</a:t>
             </a:r>
           </a:p>
           <a:p>
             <a:pPr lvl="1"/>
             <a:r>
-              <a:rPr lang="en-US" altLang="zh-TW" smtClean="0"/>
+              <a:rPr lang="en-US" altLang="zh-TW"/>
               <a:t>Second level</a:t>
             </a:r>
           </a:p>
           <a:p>
             <a:pPr lvl="2"/>
             <a:r>
-              <a:rPr lang="en-US" altLang="zh-TW" smtClean="0"/>
+              <a:rPr lang="en-US" altLang="zh-TW"/>
               <a:t>Third level</a:t>
             </a:r>
           </a:p>
           <a:p>
             <a:pPr lvl="3"/>
             <a:r>
-              <a:rPr lang="en-US" altLang="zh-TW" smtClean="0"/>
+              <a:rPr lang="en-US" altLang="zh-TW"/>
               <a:t>Fourth level</a:t>
             </a:r>
           </a:p>
           <a:p>
             <a:pPr lvl="4"/>
             <a:r>
-              <a:rPr lang="en-US" altLang="zh-TW" smtClean="0"/>
+              <a:rPr lang="en-US" altLang="zh-TW"/>
               <a:t>Fifth level</a:t>
             </a:r>
             <a:endParaRPr lang="zh-TW" altLang="en-US"/>
@@ -1779,7 +1779,7 @@
           <a:p>
             <a:fld id="{73FD648D-8B53-4CD8-850C-5D4A2D6A8C55}" type="datetimeFigureOut">
               <a:rPr lang="vi-VN" smtClean="0"/>
-              <a:t>15/04/2023</a:t>
+              <a:t>12/04/2025</a:t>
             </a:fld>
             <a:endParaRPr lang="vi-VN"/>
           </a:p>
@@ -1873,7 +1873,7 @@
           <a:lstStyle/>
           <a:p>
             <a:r>
-              <a:rPr lang="en-US" altLang="zh-TW" smtClean="0"/>
+              <a:rPr lang="en-US" altLang="zh-TW"/>
               <a:t>Click to edit Master title style</a:t>
             </a:r>
             <a:endParaRPr lang="zh-TW" altLang="en-US"/>
@@ -1897,7 +1897,7 @@
           <a:p>
             <a:fld id="{73FD648D-8B53-4CD8-850C-5D4A2D6A8C55}" type="datetimeFigureOut">
               <a:rPr lang="vi-VN" smtClean="0"/>
-              <a:t>15/04/2023</a:t>
+              <a:t>12/04/2025</a:t>
             </a:fld>
             <a:endParaRPr lang="vi-VN"/>
           </a:p>
@@ -1992,7 +1992,7 @@
           <a:p>
             <a:fld id="{73FD648D-8B53-4CD8-850C-5D4A2D6A8C55}" type="datetimeFigureOut">
               <a:rPr lang="vi-VN" smtClean="0"/>
-              <a:t>15/04/2023</a:t>
+              <a:t>12/04/2025</a:t>
             </a:fld>
             <a:endParaRPr lang="vi-VN"/>
           </a:p>
@@ -2095,7 +2095,7 @@
           </a:lstStyle>
           <a:p>
             <a:r>
-              <a:rPr lang="en-US" altLang="zh-TW" smtClean="0"/>
+              <a:rPr lang="en-US" altLang="zh-TW"/>
               <a:t>Click to edit Master title style</a:t>
             </a:r>
             <a:endParaRPr lang="zh-TW" altLang="en-US"/>
@@ -2152,35 +2152,35 @@
           <a:p>
             <a:pPr lvl="0"/>
             <a:r>
-              <a:rPr lang="en-US" altLang="zh-TW" smtClean="0"/>
+              <a:rPr lang="en-US" altLang="zh-TW"/>
               <a:t>Edit Master text styles</a:t>
             </a:r>
           </a:p>
           <a:p>
             <a:pPr lvl="1"/>
             <a:r>
-              <a:rPr lang="en-US" altLang="zh-TW" smtClean="0"/>
+              <a:rPr lang="en-US" altLang="zh-TW"/>
               <a:t>Second level</a:t>
             </a:r>
           </a:p>
           <a:p>
             <a:pPr lvl="2"/>
             <a:r>
-              <a:rPr lang="en-US" altLang="zh-TW" smtClean="0"/>
+              <a:rPr lang="en-US" altLang="zh-TW"/>
               <a:t>Third level</a:t>
             </a:r>
           </a:p>
           <a:p>
             <a:pPr lvl="3"/>
             <a:r>
-              <a:rPr lang="en-US" altLang="zh-TW" smtClean="0"/>
+              <a:rPr lang="en-US" altLang="zh-TW"/>
               <a:t>Fourth level</a:t>
             </a:r>
           </a:p>
           <a:p>
             <a:pPr lvl="4"/>
             <a:r>
-              <a:rPr lang="en-US" altLang="zh-TW" smtClean="0"/>
+              <a:rPr lang="en-US" altLang="zh-TW"/>
               <a:t>Fifth level</a:t>
             </a:r>
             <a:endParaRPr lang="zh-TW" altLang="en-US"/>
@@ -2246,7 +2246,7 @@
           <a:p>
             <a:pPr lvl="0"/>
             <a:r>
-              <a:rPr lang="en-US" altLang="zh-TW" smtClean="0"/>
+              <a:rPr lang="en-US" altLang="zh-TW"/>
               <a:t>Edit Master text styles</a:t>
             </a:r>
           </a:p>
@@ -2269,7 +2269,7 @@
           <a:p>
             <a:fld id="{73FD648D-8B53-4CD8-850C-5D4A2D6A8C55}" type="datetimeFigureOut">
               <a:rPr lang="vi-VN" smtClean="0"/>
-              <a:t>15/04/2023</a:t>
+              <a:t>12/04/2025</a:t>
             </a:fld>
             <a:endParaRPr lang="vi-VN"/>
           </a:p>
@@ -2372,7 +2372,7 @@
           </a:lstStyle>
           <a:p>
             <a:r>
-              <a:rPr lang="en-US" altLang="zh-TW" smtClean="0"/>
+              <a:rPr lang="en-US" altLang="zh-TW"/>
               <a:t>Click to edit Master title style</a:t>
             </a:r>
             <a:endParaRPr lang="zh-TW" altLang="en-US"/>
@@ -2437,7 +2437,7 @@
           </a:lstStyle>
           <a:p>
             <a:r>
-              <a:rPr lang="en-US" altLang="zh-TW" smtClean="0"/>
+              <a:rPr lang="en-US" altLang="zh-TW"/>
               <a:t>Click icon to add picture</a:t>
             </a:r>
             <a:endParaRPr lang="zh-TW" altLang="en-US"/>
@@ -2503,7 +2503,7 @@
           <a:p>
             <a:pPr lvl="0"/>
             <a:r>
-              <a:rPr lang="en-US" altLang="zh-TW" smtClean="0"/>
+              <a:rPr lang="en-US" altLang="zh-TW"/>
               <a:t>Edit Master text styles</a:t>
             </a:r>
           </a:p>
@@ -2526,7 +2526,7 @@
           <a:p>
             <a:fld id="{73FD648D-8B53-4CD8-850C-5D4A2D6A8C55}" type="datetimeFigureOut">
               <a:rPr lang="vi-VN" smtClean="0"/>
-              <a:t>15/04/2023</a:t>
+              <a:t>12/04/2025</a:t>
             </a:fld>
             <a:endParaRPr lang="vi-VN"/>
           </a:p>
@@ -2640,10 +2640,9 @@
           <a:lstStyle/>
           <a:p>
             <a:r>
-              <a:rPr lang="zh-TW" altLang="en-US" smtClean="0"/>
+              <a:rPr lang="zh-TW" altLang="en-US"/>
               <a:t>按一下以編輯母片標題樣式</a:t>
             </a:r>
-            <a:endParaRPr lang="zh-TW" altLang="en-US"/>
           </a:p>
         </p:txBody>
       </p:sp>
@@ -2674,38 +2673,37 @@
           <a:p>
             <a:pPr lvl="0"/>
             <a:r>
-              <a:rPr lang="zh-TW" altLang="en-US" smtClean="0"/>
+              <a:rPr lang="zh-TW" altLang="en-US"/>
               <a:t>按一下以編輯母片文字樣式</a:t>
             </a:r>
           </a:p>
           <a:p>
             <a:pPr lvl="1"/>
             <a:r>
-              <a:rPr lang="zh-TW" altLang="en-US" smtClean="0"/>
+              <a:rPr lang="zh-TW" altLang="en-US"/>
               <a:t>第二層</a:t>
             </a:r>
           </a:p>
           <a:p>
             <a:pPr lvl="2"/>
             <a:r>
-              <a:rPr lang="zh-TW" altLang="en-US" smtClean="0"/>
+              <a:rPr lang="zh-TW" altLang="en-US"/>
               <a:t>第三層</a:t>
             </a:r>
           </a:p>
           <a:p>
             <a:pPr lvl="3"/>
             <a:r>
-              <a:rPr lang="zh-TW" altLang="en-US" smtClean="0"/>
+              <a:rPr lang="zh-TW" altLang="en-US"/>
               <a:t>第四層</a:t>
             </a:r>
           </a:p>
           <a:p>
             <a:pPr lvl="4"/>
             <a:r>
-              <a:rPr lang="zh-TW" altLang="en-US" smtClean="0"/>
+              <a:rPr lang="zh-TW" altLang="en-US"/>
               <a:t>第五層</a:t>
             </a:r>
-            <a:endParaRPr lang="zh-TW" altLang="en-US"/>
           </a:p>
         </p:txBody>
       </p:sp>
@@ -2744,7 +2742,7 @@
           <a:p>
             <a:fld id="{73FD648D-8B53-4CD8-850C-5D4A2D6A8C55}" type="datetimeFigureOut">
               <a:rPr lang="vi-VN" smtClean="0"/>
-              <a:t>15/04/2023</a:t>
+              <a:t>12/04/2025</a:t>
             </a:fld>
             <a:endParaRPr lang="vi-VN"/>
           </a:p>
@@ -3299,7 +3297,7 @@
                 <a:latin typeface="Microsoft JhengHei" panose="020B0604030504040204" pitchFamily="34" charset="-120"/>
                 <a:ea typeface="Microsoft JhengHei" panose="020B0604030504040204" pitchFamily="34" charset="-120"/>
               </a:rPr>
-              <a:t>正 </a:t>
+              <a:t>正歌 </a:t>
             </a:r>
             <a:r>
               <a:rPr lang="en-US" altLang="zh-CN" sz="3600" b="1" dirty="0">
@@ -3437,7 +3435,7 @@
         <p:spPr>
           <a:xfrm>
             <a:off x="0" y="5253203"/>
-            <a:ext cx="12192000" cy="769441"/>
+            <a:ext cx="12192000" cy="707886"/>
           </a:xfrm>
           <a:prstGeom prst="rect">
             <a:avLst/>
@@ -3462,45 +3460,60 @@
               <a:t>( </a:t>
             </a:r>
             <a:r>
-              <a:rPr lang="zh-CN" altLang="en-US" sz="4000" b="1" dirty="0" smtClean="0">
+              <a:rPr lang="zh-CN" altLang="en-US" sz="4000" b="1" dirty="0">
                 <a:solidFill>
                   <a:srgbClr val="660033"/>
                 </a:solidFill>
                 <a:latin typeface="Microsoft JhengHei" panose="020B0604030504040204" pitchFamily="34" charset="-120"/>
                 <a:ea typeface="Microsoft JhengHei" panose="020B0604030504040204" pitchFamily="34" charset="-120"/>
               </a:rPr>
-              <a:t>副</a:t>
-            </a:r>
-            <a:r>
-              <a:rPr lang="en-US" sz="4000" b="1" dirty="0" smtClean="0">
+              <a:t>副歌 </a:t>
+            </a:r>
+            <a:r>
+              <a:rPr lang="en-US" altLang="zh-CN" sz="4000" b="1" dirty="0">
                 <a:solidFill>
                   <a:srgbClr val="660033"/>
                 </a:solidFill>
                 <a:latin typeface="Microsoft JhengHei" panose="020B0604030504040204" pitchFamily="34" charset="-120"/>
                 <a:ea typeface="Microsoft JhengHei" panose="020B0604030504040204" pitchFamily="34" charset="-120"/>
               </a:rPr>
-              <a:t> ) </a:t>
-            </a:r>
-            <a:r>
-              <a:rPr lang="en-US" sz="4267" b="1" dirty="0" smtClean="0">
-                <a:solidFill>
-                  <a:srgbClr val="660033"/>
-                </a:solidFill>
-              </a:rPr>
-              <a:t>( </a:t>
-            </a:r>
-            <a:r>
-              <a:rPr lang="en-US" sz="4267" b="1" dirty="0">
-                <a:solidFill>
-                  <a:srgbClr val="660033"/>
-                </a:solidFill>
-              </a:rPr>
-              <a:t>x2 )</a:t>
-            </a:r>
-            <a:endParaRPr lang="vi-VN" sz="4267" b="1" dirty="0">
+              <a:t>2</a:t>
+            </a:r>
+            <a:r>
+              <a:rPr lang="en-US" sz="4000" b="1" dirty="0">
+                <a:solidFill>
+                  <a:srgbClr val="660033"/>
+                </a:solidFill>
+                <a:latin typeface="Microsoft JhengHei" panose="020B0604030504040204" pitchFamily="34" charset="-120"/>
+                <a:ea typeface="Microsoft JhengHei" panose="020B0604030504040204" pitchFamily="34" charset="-120"/>
+              </a:rPr>
+              <a:t> ) ( 2</a:t>
+            </a:r>
+            <a:r>
+              <a:rPr lang="zh-CN" altLang="en-US" sz="4000" b="1" dirty="0">
+                <a:solidFill>
+                  <a:srgbClr val="660033"/>
+                </a:solidFill>
+                <a:latin typeface="Microsoft JhengHei" panose="020B0604030504040204" pitchFamily="34" charset="-120"/>
+                <a:ea typeface="Microsoft JhengHei" panose="020B0604030504040204" pitchFamily="34" charset="-120"/>
+              </a:rPr>
+              <a:t>次</a:t>
+            </a:r>
+            <a:r>
+              <a:rPr lang="en-US" sz="4000" b="1" dirty="0">
+                <a:solidFill>
+                  <a:srgbClr val="660033"/>
+                </a:solidFill>
+                <a:latin typeface="Microsoft JhengHei" panose="020B0604030504040204" pitchFamily="34" charset="-120"/>
+                <a:ea typeface="Microsoft JhengHei" panose="020B0604030504040204" pitchFamily="34" charset="-120"/>
+              </a:rPr>
+              <a:t> )</a:t>
+            </a:r>
+            <a:endParaRPr lang="vi-VN" sz="4000" b="1" dirty="0">
               <a:solidFill>
                 <a:srgbClr val="660033"/>
               </a:solidFill>
+              <a:ea typeface="Microsoft JhengHei" panose="020B0604030504040204" pitchFamily="34" charset="-120"/>
             </a:endParaRPr>
           </a:p>
         </p:txBody>
@@ -3626,7 +3639,7 @@
           <a:p>
             <a:pPr algn="ctr"/>
             <a:r>
-              <a:rPr lang="en-US" sz="3600" b="1" dirty="0" smtClean="0">
+              <a:rPr lang="en-US" sz="3600" b="1" dirty="0">
                 <a:solidFill>
                   <a:srgbClr val="660033"/>
                 </a:solidFill>
@@ -3637,7 +3650,7 @@
               <a:t>( </a:t>
             </a:r>
             <a:r>
-              <a:rPr lang="zh-CN" altLang="en-US" sz="3600" b="1" dirty="0" smtClean="0">
+              <a:rPr lang="zh-CN" altLang="en-US" sz="3600" b="1" dirty="0">
                 <a:solidFill>
                   <a:srgbClr val="660033"/>
                 </a:solidFill>
@@ -3645,10 +3658,10 @@
                 <a:latin typeface="Microsoft JhengHei" panose="020B0604030504040204" pitchFamily="34" charset="-120"/>
                 <a:ea typeface="Microsoft JhengHei" panose="020B0604030504040204" pitchFamily="34" charset="-120"/>
               </a:rPr>
-              <a:t>正 </a:t>
-            </a:r>
-            <a:r>
-              <a:rPr lang="en-US" altLang="zh-CN" sz="3600" b="1" dirty="0" smtClean="0">
+              <a:t>正歌 </a:t>
+            </a:r>
+            <a:r>
+              <a:rPr lang="en-US" altLang="zh-CN" sz="3600" b="1" dirty="0">
                 <a:solidFill>
                   <a:srgbClr val="660033"/>
                 </a:solidFill>
@@ -3659,7 +3672,7 @@
               <a:t>1</a:t>
             </a:r>
             <a:r>
-              <a:rPr lang="en-US" sz="3600" b="1" dirty="0" smtClean="0">
+              <a:rPr lang="en-US" sz="3600" b="1" dirty="0">
                 <a:solidFill>
                   <a:srgbClr val="660033"/>
                 </a:solidFill>
@@ -3804,6 +3817,7 @@
                 <a:solidFill>
                   <a:srgbClr val="660033"/>
                 </a:solidFill>
+                <a:effectLst/>
                 <a:latin typeface="Microsoft JhengHei" panose="020B0604030504040204" pitchFamily="34" charset="-120"/>
                 <a:ea typeface="Microsoft JhengHei" panose="020B0604030504040204" pitchFamily="34" charset="-120"/>
               </a:rPr>
@@ -3814,16 +3828,18 @@
                 <a:solidFill>
                   <a:srgbClr val="660033"/>
                 </a:solidFill>
+                <a:effectLst/>
                 <a:latin typeface="Microsoft JhengHei" panose="020B0604030504040204" pitchFamily="34" charset="-120"/>
                 <a:ea typeface="Microsoft JhengHei" panose="020B0604030504040204" pitchFamily="34" charset="-120"/>
               </a:rPr>
-              <a:t>正 </a:t>
+              <a:t>正歌 </a:t>
             </a:r>
             <a:r>
               <a:rPr lang="en-US" altLang="zh-CN" sz="3600" b="1" dirty="0">
                 <a:solidFill>
                   <a:srgbClr val="660033"/>
                 </a:solidFill>
+                <a:effectLst/>
                 <a:latin typeface="Microsoft JhengHei" panose="020B0604030504040204" pitchFamily="34" charset="-120"/>
                 <a:ea typeface="Microsoft JhengHei" panose="020B0604030504040204" pitchFamily="34" charset="-120"/>
               </a:rPr>
@@ -3834,6 +3850,7 @@
                 <a:solidFill>
                   <a:srgbClr val="660033"/>
                 </a:solidFill>
+                <a:effectLst/>
                 <a:latin typeface="Microsoft JhengHei" panose="020B0604030504040204" pitchFamily="34" charset="-120"/>
                 <a:ea typeface="Microsoft JhengHei" panose="020B0604030504040204" pitchFamily="34" charset="-120"/>
               </a:rPr>
@@ -3843,7 +3860,7 @@
               <a:solidFill>
                 <a:srgbClr val="660033"/>
               </a:solidFill>
-              <a:latin typeface="Microsoft JhengHei" panose="020B0604030504040204" pitchFamily="34" charset="-120"/>
+              <a:effectLst/>
               <a:ea typeface="Microsoft JhengHei" panose="020B0604030504040204" pitchFamily="34" charset="-120"/>
             </a:endParaRPr>
           </a:p>
@@ -3974,6 +3991,7 @@
                 <a:solidFill>
                   <a:srgbClr val="660033"/>
                 </a:solidFill>
+                <a:effectLst/>
                 <a:latin typeface="Microsoft JhengHei" panose="020B0604030504040204" pitchFamily="34" charset="-120"/>
                 <a:ea typeface="Microsoft JhengHei" panose="020B0604030504040204" pitchFamily="34" charset="-120"/>
               </a:rPr>
@@ -3984,16 +4002,18 @@
                 <a:solidFill>
                   <a:srgbClr val="660033"/>
                 </a:solidFill>
+                <a:effectLst/>
                 <a:latin typeface="Microsoft JhengHei" panose="020B0604030504040204" pitchFamily="34" charset="-120"/>
                 <a:ea typeface="Microsoft JhengHei" panose="020B0604030504040204" pitchFamily="34" charset="-120"/>
               </a:rPr>
-              <a:t>正 </a:t>
+              <a:t>正歌 </a:t>
             </a:r>
             <a:r>
               <a:rPr lang="en-US" altLang="zh-CN" sz="3600" b="1" dirty="0">
                 <a:solidFill>
                   <a:srgbClr val="660033"/>
                 </a:solidFill>
+                <a:effectLst/>
                 <a:latin typeface="Microsoft JhengHei" panose="020B0604030504040204" pitchFamily="34" charset="-120"/>
                 <a:ea typeface="Microsoft JhengHei" panose="020B0604030504040204" pitchFamily="34" charset="-120"/>
               </a:rPr>
@@ -4004,6 +4024,7 @@
                 <a:solidFill>
                   <a:srgbClr val="660033"/>
                 </a:solidFill>
+                <a:effectLst/>
                 <a:latin typeface="Microsoft JhengHei" panose="020B0604030504040204" pitchFamily="34" charset="-120"/>
                 <a:ea typeface="Microsoft JhengHei" panose="020B0604030504040204" pitchFamily="34" charset="-120"/>
               </a:rPr>
@@ -4013,7 +4034,7 @@
               <a:solidFill>
                 <a:srgbClr val="660033"/>
               </a:solidFill>
-              <a:latin typeface="Microsoft JhengHei" panose="020B0604030504040204" pitchFamily="34" charset="-120"/>
+              <a:effectLst/>
               <a:ea typeface="Microsoft JhengHei" panose="020B0604030504040204" pitchFamily="34" charset="-120"/>
             </a:endParaRPr>
           </a:p>
@@ -4144,6 +4165,7 @@
                 <a:solidFill>
                   <a:srgbClr val="660033"/>
                 </a:solidFill>
+                <a:effectLst/>
                 <a:latin typeface="Microsoft JhengHei" panose="020B0604030504040204" pitchFamily="34" charset="-120"/>
                 <a:ea typeface="Microsoft JhengHei" panose="020B0604030504040204" pitchFamily="34" charset="-120"/>
               </a:rPr>
@@ -4154,16 +4176,18 @@
                 <a:solidFill>
                   <a:srgbClr val="660033"/>
                 </a:solidFill>
+                <a:effectLst/>
                 <a:latin typeface="Microsoft JhengHei" panose="020B0604030504040204" pitchFamily="34" charset="-120"/>
                 <a:ea typeface="Microsoft JhengHei" panose="020B0604030504040204" pitchFamily="34" charset="-120"/>
               </a:rPr>
-              <a:t>正 </a:t>
+              <a:t>正歌 </a:t>
             </a:r>
             <a:r>
               <a:rPr lang="en-US" altLang="zh-CN" sz="3600" b="1" dirty="0">
                 <a:solidFill>
                   <a:srgbClr val="660033"/>
                 </a:solidFill>
+                <a:effectLst/>
                 <a:latin typeface="Microsoft JhengHei" panose="020B0604030504040204" pitchFamily="34" charset="-120"/>
                 <a:ea typeface="Microsoft JhengHei" panose="020B0604030504040204" pitchFamily="34" charset="-120"/>
               </a:rPr>
@@ -4174,6 +4198,7 @@
                 <a:solidFill>
                   <a:srgbClr val="660033"/>
                 </a:solidFill>
+                <a:effectLst/>
                 <a:latin typeface="Microsoft JhengHei" panose="020B0604030504040204" pitchFamily="34" charset="-120"/>
                 <a:ea typeface="Microsoft JhengHei" panose="020B0604030504040204" pitchFamily="34" charset="-120"/>
               </a:rPr>
@@ -4183,7 +4208,7 @@
               <a:solidFill>
                 <a:srgbClr val="660033"/>
               </a:solidFill>
-              <a:latin typeface="Microsoft JhengHei" panose="020B0604030504040204" pitchFamily="34" charset="-120"/>
+              <a:effectLst/>
               <a:ea typeface="Microsoft JhengHei" panose="020B0604030504040204" pitchFamily="34" charset="-120"/>
             </a:endParaRPr>
           </a:p>
@@ -4295,7 +4320,7 @@
         <p:spPr>
           <a:xfrm>
             <a:off x="0" y="5253203"/>
-            <a:ext cx="12192000" cy="769441"/>
+            <a:ext cx="12192000" cy="707886"/>
           </a:xfrm>
           <a:prstGeom prst="rect">
             <a:avLst/>
@@ -4320,45 +4345,50 @@
               <a:t>( </a:t>
             </a:r>
             <a:r>
-              <a:rPr lang="zh-CN" altLang="en-US" sz="4000" b="1" dirty="0" smtClean="0">
+              <a:rPr lang="zh-CN" altLang="en-US" sz="4000" b="1" dirty="0">
                 <a:solidFill>
                   <a:srgbClr val="660033"/>
                 </a:solidFill>
                 <a:latin typeface="Microsoft JhengHei" panose="020B0604030504040204" pitchFamily="34" charset="-120"/>
                 <a:ea typeface="Microsoft JhengHei" panose="020B0604030504040204" pitchFamily="34" charset="-120"/>
               </a:rPr>
-              <a:t>副</a:t>
-            </a:r>
-            <a:r>
-              <a:rPr lang="en-US" sz="4000" b="1" dirty="0" smtClean="0">
+              <a:t>副歌</a:t>
+            </a:r>
+            <a:r>
+              <a:rPr lang="en-US" sz="4000" b="1" dirty="0">
                 <a:solidFill>
                   <a:srgbClr val="660033"/>
                 </a:solidFill>
                 <a:latin typeface="Microsoft JhengHei" panose="020B0604030504040204" pitchFamily="34" charset="-120"/>
                 <a:ea typeface="Microsoft JhengHei" panose="020B0604030504040204" pitchFamily="34" charset="-120"/>
               </a:rPr>
-              <a:t> ) </a:t>
-            </a:r>
-            <a:r>
-              <a:rPr lang="en-US" sz="4267" b="1" dirty="0" smtClean="0">
-                <a:solidFill>
-                  <a:srgbClr val="660033"/>
-                </a:solidFill>
-              </a:rPr>
-              <a:t>( </a:t>
-            </a:r>
-            <a:r>
-              <a:rPr lang="en-US" sz="4267" b="1" dirty="0">
-                <a:solidFill>
-                  <a:srgbClr val="660033"/>
-                </a:solidFill>
-              </a:rPr>
-              <a:t>x2 )</a:t>
-            </a:r>
-            <a:endParaRPr lang="vi-VN" sz="4267" b="1" dirty="0">
+              <a:t> ) ( 2</a:t>
+            </a:r>
+            <a:r>
+              <a:rPr lang="zh-CN" altLang="en-US" sz="4000" b="1" dirty="0">
+                <a:solidFill>
+                  <a:srgbClr val="660033"/>
+                </a:solidFill>
+                <a:latin typeface="Microsoft JhengHei" panose="020B0604030504040204" pitchFamily="34" charset="-120"/>
+                <a:ea typeface="Microsoft JhengHei" panose="020B0604030504040204" pitchFamily="34" charset="-120"/>
+              </a:rPr>
+              <a:t>次</a:t>
+            </a:r>
+            <a:r>
+              <a:rPr lang="en-US" sz="4000" b="1" dirty="0">
+                <a:solidFill>
+                  <a:srgbClr val="660033"/>
+                </a:solidFill>
+                <a:latin typeface="Microsoft JhengHei" panose="020B0604030504040204" pitchFamily="34" charset="-120"/>
+                <a:ea typeface="Microsoft JhengHei" panose="020B0604030504040204" pitchFamily="34" charset="-120"/>
+              </a:rPr>
+              <a:t> )</a:t>
+            </a:r>
+            <a:endParaRPr lang="vi-VN" sz="4000" b="1" dirty="0">
               <a:solidFill>
                 <a:srgbClr val="660033"/>
               </a:solidFill>
+              <a:ea typeface="Microsoft JhengHei" panose="020B0604030504040204" pitchFamily="34" charset="-120"/>
             </a:endParaRPr>
           </a:p>
         </p:txBody>
@@ -4501,7 +4531,7 @@
                 <a:latin typeface="Microsoft JhengHei" panose="020B0604030504040204" pitchFamily="34" charset="-120"/>
                 <a:ea typeface="Microsoft JhengHei" panose="020B0604030504040204" pitchFamily="34" charset="-120"/>
               </a:rPr>
-              <a:t>正 </a:t>
+              <a:t>正歌 </a:t>
             </a:r>
             <a:r>
               <a:rPr lang="en-US" altLang="zh-CN" sz="3600" b="1" dirty="0">
@@ -4671,7 +4701,7 @@
                 <a:latin typeface="Microsoft JhengHei" panose="020B0604030504040204" pitchFamily="34" charset="-120"/>
                 <a:ea typeface="Microsoft JhengHei" panose="020B0604030504040204" pitchFamily="34" charset="-120"/>
               </a:rPr>
-              <a:t>正 </a:t>
+              <a:t>正歌 </a:t>
             </a:r>
             <a:r>
               <a:rPr lang="en-US" altLang="zh-CN" sz="3600" b="1" dirty="0">
@@ -4841,7 +4871,7 @@
                 <a:latin typeface="Microsoft JhengHei" panose="020B0604030504040204" pitchFamily="34" charset="-120"/>
                 <a:ea typeface="Microsoft JhengHei" panose="020B0604030504040204" pitchFamily="34" charset="-120"/>
               </a:rPr>
-              <a:t>正 </a:t>
+              <a:t>正歌 </a:t>
             </a:r>
             <a:r>
               <a:rPr lang="en-US" altLang="zh-CN" sz="3600" b="1" dirty="0">

--- a/耶穌基督是主_小羊詩歌.pptx
+++ b/耶穌基督是主_小羊詩歌.pptx
@@ -8,14 +8,10 @@
     <p:sldId id="257" r:id="rId2"/>
     <p:sldId id="258" r:id="rId3"/>
     <p:sldId id="259" r:id="rId4"/>
-    <p:sldId id="260" r:id="rId5"/>
-    <p:sldId id="261" r:id="rId6"/>
-    <p:sldId id="262" r:id="rId7"/>
-    <p:sldId id="263" r:id="rId8"/>
-    <p:sldId id="264" r:id="rId9"/>
-    <p:sldId id="265" r:id="rId10"/>
-    <p:sldId id="266" r:id="rId11"/>
-    <p:sldId id="267" r:id="rId12"/>
+    <p:sldId id="262" r:id="rId5"/>
+    <p:sldId id="263" r:id="rId6"/>
+    <p:sldId id="264" r:id="rId7"/>
+    <p:sldId id="267" r:id="rId8"/>
   </p:sldIdLst>
   <p:sldSz cx="12192000" cy="6858000"/>
   <p:notesSz cx="6858000" cy="9144000"/>
@@ -303,7 +299,7 @@
           <a:p>
             <a:fld id="{73FD648D-8B53-4CD8-850C-5D4A2D6A8C55}" type="datetimeFigureOut">
               <a:rPr lang="vi-VN" smtClean="0"/>
-              <a:t>12/04/2025</a:t>
+              <a:t>09/05/2025</a:t>
             </a:fld>
             <a:endParaRPr lang="vi-VN"/>
           </a:p>
@@ -473,7 +469,7 @@
           <a:p>
             <a:fld id="{73FD648D-8B53-4CD8-850C-5D4A2D6A8C55}" type="datetimeFigureOut">
               <a:rPr lang="vi-VN" smtClean="0"/>
-              <a:t>12/04/2025</a:t>
+              <a:t>09/05/2025</a:t>
             </a:fld>
             <a:endParaRPr lang="vi-VN"/>
           </a:p>
@@ -653,7 +649,7 @@
           <a:p>
             <a:fld id="{73FD648D-8B53-4CD8-850C-5D4A2D6A8C55}" type="datetimeFigureOut">
               <a:rPr lang="vi-VN" smtClean="0"/>
-              <a:t>12/04/2025</a:t>
+              <a:t>09/05/2025</a:t>
             </a:fld>
             <a:endParaRPr lang="vi-VN"/>
           </a:p>
@@ -823,7 +819,7 @@
           <a:p>
             <a:fld id="{73FD648D-8B53-4CD8-850C-5D4A2D6A8C55}" type="datetimeFigureOut">
               <a:rPr lang="vi-VN" smtClean="0"/>
-              <a:t>12/04/2025</a:t>
+              <a:t>09/05/2025</a:t>
             </a:fld>
             <a:endParaRPr lang="vi-VN"/>
           </a:p>
@@ -1069,7 +1065,7 @@
           <a:p>
             <a:fld id="{73FD648D-8B53-4CD8-850C-5D4A2D6A8C55}" type="datetimeFigureOut">
               <a:rPr lang="vi-VN" smtClean="0"/>
-              <a:t>12/04/2025</a:t>
+              <a:t>09/05/2025</a:t>
             </a:fld>
             <a:endParaRPr lang="vi-VN"/>
           </a:p>
@@ -1357,7 +1353,7 @@
           <a:p>
             <a:fld id="{73FD648D-8B53-4CD8-850C-5D4A2D6A8C55}" type="datetimeFigureOut">
               <a:rPr lang="vi-VN" smtClean="0"/>
-              <a:t>12/04/2025</a:t>
+              <a:t>09/05/2025</a:t>
             </a:fld>
             <a:endParaRPr lang="vi-VN"/>
           </a:p>
@@ -1779,7 +1775,7 @@
           <a:p>
             <a:fld id="{73FD648D-8B53-4CD8-850C-5D4A2D6A8C55}" type="datetimeFigureOut">
               <a:rPr lang="vi-VN" smtClean="0"/>
-              <a:t>12/04/2025</a:t>
+              <a:t>09/05/2025</a:t>
             </a:fld>
             <a:endParaRPr lang="vi-VN"/>
           </a:p>
@@ -1897,7 +1893,7 @@
           <a:p>
             <a:fld id="{73FD648D-8B53-4CD8-850C-5D4A2D6A8C55}" type="datetimeFigureOut">
               <a:rPr lang="vi-VN" smtClean="0"/>
-              <a:t>12/04/2025</a:t>
+              <a:t>09/05/2025</a:t>
             </a:fld>
             <a:endParaRPr lang="vi-VN"/>
           </a:p>
@@ -1992,7 +1988,7 @@
           <a:p>
             <a:fld id="{73FD648D-8B53-4CD8-850C-5D4A2D6A8C55}" type="datetimeFigureOut">
               <a:rPr lang="vi-VN" smtClean="0"/>
-              <a:t>12/04/2025</a:t>
+              <a:t>09/05/2025</a:t>
             </a:fld>
             <a:endParaRPr lang="vi-VN"/>
           </a:p>
@@ -2269,7 +2265,7 @@
           <a:p>
             <a:fld id="{73FD648D-8B53-4CD8-850C-5D4A2D6A8C55}" type="datetimeFigureOut">
               <a:rPr lang="vi-VN" smtClean="0"/>
-              <a:t>12/04/2025</a:t>
+              <a:t>09/05/2025</a:t>
             </a:fld>
             <a:endParaRPr lang="vi-VN"/>
           </a:p>
@@ -2526,7 +2522,7 @@
           <a:p>
             <a:fld id="{73FD648D-8B53-4CD8-850C-5D4A2D6A8C55}" type="datetimeFigureOut">
               <a:rPr lang="vi-VN" smtClean="0"/>
-              <a:t>12/04/2025</a:t>
+              <a:t>09/05/2025</a:t>
             </a:fld>
             <a:endParaRPr lang="vi-VN"/>
           </a:p>
@@ -2742,7 +2738,7 @@
           <a:p>
             <a:fld id="{73FD648D-8B53-4CD8-850C-5D4A2D6A8C55}" type="datetimeFigureOut">
               <a:rPr lang="vi-VN" smtClean="0"/>
-              <a:t>12/04/2025</a:t>
+              <a:t>09/05/2025</a:t>
             </a:fld>
             <a:endParaRPr lang="vi-VN"/>
           </a:p>
@@ -3172,365 +3168,6 @@
 </p:sld>
 </file>
 
-<file path=ppt/slides/slide10.xml><?xml version="1.0" encoding="utf-8"?>
-<p:sld xmlns:a="http://schemas.openxmlformats.org/drawingml/2006/main" xmlns:r="http://schemas.openxmlformats.org/officeDocument/2006/relationships" xmlns:p="http://schemas.openxmlformats.org/presentationml/2006/main">
-  <p:cSld>
-    <p:spTree>
-      <p:nvGrpSpPr>
-        <p:cNvPr id="1" name=""/>
-        <p:cNvGrpSpPr/>
-        <p:nvPr/>
-      </p:nvGrpSpPr>
-      <p:grpSpPr>
-        <a:xfrm>
-          <a:off x="0" y="0"/>
-          <a:ext cx="0" cy="0"/>
-          <a:chOff x="0" y="0"/>
-          <a:chExt cx="0" cy="0"/>
-        </a:xfrm>
-      </p:grpSpPr>
-      <p:sp>
-        <p:nvSpPr>
-          <p:cNvPr id="5" name="內容版面配置區 4"/>
-          <p:cNvSpPr>
-            <a:spLocks noGrp="1"/>
-          </p:cNvSpPr>
-          <p:nvPr>
-            <p:ph idx="1"/>
-          </p:nvPr>
-        </p:nvSpPr>
-        <p:spPr>
-          <a:xfrm>
-            <a:off x="0" y="2084853"/>
-            <a:ext cx="12192000" cy="2404863"/>
-          </a:xfrm>
-        </p:spPr>
-        <p:txBody>
-          <a:bodyPr anchor="ctr">
-            <a:normAutofit/>
-          </a:bodyPr>
-          <a:lstStyle/>
-          <a:p>
-            <a:pPr algn="ctr">
-              <a:buNone/>
-            </a:pPr>
-            <a:r>
-              <a:rPr lang="zh-TW" altLang="en-US" sz="6400" b="1" dirty="0">
-                <a:solidFill>
-                  <a:srgbClr val="660033"/>
-                </a:solidFill>
-                <a:latin typeface="Microsoft JhengHei" pitchFamily="34" charset="-120"/>
-                <a:ea typeface="Microsoft JhengHei" pitchFamily="34" charset="-120"/>
-              </a:rPr>
-              <a:t>祂是我的主我的王</a:t>
-            </a:r>
-            <a:endParaRPr lang="en-US" altLang="zh-TW" sz="6400" b="1" dirty="0">
-              <a:solidFill>
-                <a:srgbClr val="660033"/>
-              </a:solidFill>
-              <a:latin typeface="Microsoft JhengHei" pitchFamily="34" charset="-120"/>
-              <a:ea typeface="Microsoft JhengHei" pitchFamily="34" charset="-120"/>
-            </a:endParaRPr>
-          </a:p>
-          <a:p>
-            <a:pPr algn="ctr">
-              <a:buNone/>
-            </a:pPr>
-            <a:r>
-              <a:rPr lang="zh-TW" altLang="en-US" sz="6400" b="1" dirty="0">
-                <a:solidFill>
-                  <a:srgbClr val="660033"/>
-                </a:solidFill>
-                <a:latin typeface="Microsoft JhengHei" pitchFamily="34" charset="-120"/>
-                <a:ea typeface="Microsoft JhengHei" pitchFamily="34" charset="-120"/>
-              </a:rPr>
-              <a:t>我要敬拜祂</a:t>
-            </a:r>
-            <a:endParaRPr lang="en-US" altLang="zh-TW" sz="6400" b="1" dirty="0">
-              <a:solidFill>
-                <a:srgbClr val="660033"/>
-              </a:solidFill>
-              <a:latin typeface="Microsoft JhengHei" pitchFamily="34" charset="-120"/>
-              <a:ea typeface="Microsoft JhengHei" pitchFamily="34" charset="-120"/>
-            </a:endParaRPr>
-          </a:p>
-        </p:txBody>
-      </p:sp>
-      <p:sp>
-        <p:nvSpPr>
-          <p:cNvPr id="3" name="TextBox 2"/>
-          <p:cNvSpPr txBox="1"/>
-          <p:nvPr/>
-        </p:nvSpPr>
-        <p:spPr>
-          <a:xfrm>
-            <a:off x="0" y="5342585"/>
-            <a:ext cx="12192000" cy="646331"/>
-          </a:xfrm>
-          <a:prstGeom prst="rect">
-            <a:avLst/>
-          </a:prstGeom>
-          <a:noFill/>
-        </p:spPr>
-        <p:txBody>
-          <a:bodyPr wrap="square" rtlCol="0">
-            <a:spAutoFit/>
-          </a:bodyPr>
-          <a:lstStyle/>
-          <a:p>
-            <a:pPr algn="ctr"/>
-            <a:r>
-              <a:rPr lang="en-US" sz="3600" b="1" dirty="0">
-                <a:solidFill>
-                  <a:srgbClr val="660033"/>
-                </a:solidFill>
-                <a:latin typeface="Microsoft JhengHei" panose="020B0604030504040204" pitchFamily="34" charset="-120"/>
-                <a:ea typeface="Microsoft JhengHei" panose="020B0604030504040204" pitchFamily="34" charset="-120"/>
-              </a:rPr>
-              <a:t>( </a:t>
-            </a:r>
-            <a:r>
-              <a:rPr lang="zh-CN" altLang="en-US" sz="3600" b="1" dirty="0">
-                <a:solidFill>
-                  <a:srgbClr val="660033"/>
-                </a:solidFill>
-                <a:latin typeface="Microsoft JhengHei" panose="020B0604030504040204" pitchFamily="34" charset="-120"/>
-                <a:ea typeface="Microsoft JhengHei" panose="020B0604030504040204" pitchFamily="34" charset="-120"/>
-              </a:rPr>
-              <a:t>正歌 </a:t>
-            </a:r>
-            <a:r>
-              <a:rPr lang="en-US" altLang="zh-CN" sz="3600" b="1" dirty="0">
-                <a:solidFill>
-                  <a:srgbClr val="660033"/>
-                </a:solidFill>
-                <a:latin typeface="Microsoft JhengHei" panose="020B0604030504040204" pitchFamily="34" charset="-120"/>
-                <a:ea typeface="Microsoft JhengHei" panose="020B0604030504040204" pitchFamily="34" charset="-120"/>
-              </a:rPr>
-              <a:t>2</a:t>
-            </a:r>
-            <a:r>
-              <a:rPr lang="en-US" sz="3600" b="1" dirty="0">
-                <a:solidFill>
-                  <a:srgbClr val="660033"/>
-                </a:solidFill>
-                <a:latin typeface="Microsoft JhengHei" panose="020B0604030504040204" pitchFamily="34" charset="-120"/>
-                <a:ea typeface="Microsoft JhengHei" panose="020B0604030504040204" pitchFamily="34" charset="-120"/>
-              </a:rPr>
-              <a:t> )</a:t>
-            </a:r>
-            <a:endParaRPr lang="vi-VN" sz="3600" b="1" dirty="0">
-              <a:solidFill>
-                <a:srgbClr val="660033"/>
-              </a:solidFill>
-              <a:latin typeface="Microsoft JhengHei" panose="020B0604030504040204" pitchFamily="34" charset="-120"/>
-              <a:ea typeface="Microsoft JhengHei" panose="020B0604030504040204" pitchFamily="34" charset="-120"/>
-            </a:endParaRPr>
-          </a:p>
-        </p:txBody>
-      </p:sp>
-    </p:spTree>
-    <p:extLst>
-      <p:ext uri="{BB962C8B-B14F-4D97-AF65-F5344CB8AC3E}">
-        <p14:creationId xmlns:p14="http://schemas.microsoft.com/office/powerpoint/2010/main" val="311044811"/>
-      </p:ext>
-    </p:extLst>
-  </p:cSld>
-  <p:clrMapOvr>
-    <a:masterClrMapping/>
-  </p:clrMapOvr>
-</p:sld>
-</file>
-
-<file path=ppt/slides/slide11.xml><?xml version="1.0" encoding="utf-8"?>
-<p:sld xmlns:a="http://schemas.openxmlformats.org/drawingml/2006/main" xmlns:r="http://schemas.openxmlformats.org/officeDocument/2006/relationships" xmlns:p="http://schemas.openxmlformats.org/presentationml/2006/main">
-  <p:cSld>
-    <p:spTree>
-      <p:nvGrpSpPr>
-        <p:cNvPr id="1" name=""/>
-        <p:cNvGrpSpPr/>
-        <p:nvPr/>
-      </p:nvGrpSpPr>
-      <p:grpSpPr>
-        <a:xfrm>
-          <a:off x="0" y="0"/>
-          <a:ext cx="0" cy="0"/>
-          <a:chOff x="0" y="0"/>
-          <a:chExt cx="0" cy="0"/>
-        </a:xfrm>
-      </p:grpSpPr>
-      <p:sp>
-        <p:nvSpPr>
-          <p:cNvPr id="5" name="內容版面配置區 4"/>
-          <p:cNvSpPr>
-            <a:spLocks noGrp="1"/>
-          </p:cNvSpPr>
-          <p:nvPr>
-            <p:ph idx="1"/>
-          </p:nvPr>
-        </p:nvSpPr>
-        <p:spPr>
-          <a:xfrm>
-            <a:off x="0" y="2084853"/>
-            <a:ext cx="12192000" cy="2404863"/>
-          </a:xfrm>
-        </p:spPr>
-        <p:txBody>
-          <a:bodyPr anchor="ctr">
-            <a:normAutofit/>
-          </a:bodyPr>
-          <a:lstStyle/>
-          <a:p>
-            <a:pPr algn="ctr">
-              <a:buNone/>
-            </a:pPr>
-            <a:r>
-              <a:rPr lang="zh-TW" altLang="en-US" sz="6400" b="1" dirty="0">
-                <a:solidFill>
-                  <a:srgbClr val="660033"/>
-                </a:solidFill>
-                <a:latin typeface="Microsoft JhengHei" pitchFamily="34" charset="-120"/>
-                <a:ea typeface="Microsoft JhengHei" pitchFamily="34" charset="-120"/>
-              </a:rPr>
-              <a:t>哈利路亞  哈利路亞</a:t>
-            </a:r>
-            <a:endParaRPr lang="en-US" altLang="zh-TW" sz="6400" b="1" dirty="0">
-              <a:solidFill>
-                <a:srgbClr val="660033"/>
-              </a:solidFill>
-              <a:latin typeface="Microsoft JhengHei" pitchFamily="34" charset="-120"/>
-              <a:ea typeface="Microsoft JhengHei" pitchFamily="34" charset="-120"/>
-            </a:endParaRPr>
-          </a:p>
-          <a:p>
-            <a:pPr algn="ctr">
-              <a:buNone/>
-            </a:pPr>
-            <a:r>
-              <a:rPr lang="zh-TW" altLang="en-US" sz="6400" b="1" dirty="0">
-                <a:solidFill>
-                  <a:srgbClr val="660033"/>
-                </a:solidFill>
-                <a:latin typeface="Microsoft JhengHei" pitchFamily="34" charset="-120"/>
-                <a:ea typeface="Microsoft JhengHei" pitchFamily="34" charset="-120"/>
-              </a:rPr>
-              <a:t>耶穌基督祂是主</a:t>
-            </a:r>
-            <a:endParaRPr lang="en-US" altLang="zh-TW" sz="6400" b="1" dirty="0">
-              <a:solidFill>
-                <a:srgbClr val="660033"/>
-              </a:solidFill>
-              <a:latin typeface="Microsoft JhengHei" pitchFamily="34" charset="-120"/>
-              <a:ea typeface="Microsoft JhengHei" pitchFamily="34" charset="-120"/>
-            </a:endParaRPr>
-          </a:p>
-        </p:txBody>
-      </p:sp>
-      <p:sp>
-        <p:nvSpPr>
-          <p:cNvPr id="4" name="TextBox 3"/>
-          <p:cNvSpPr txBox="1"/>
-          <p:nvPr/>
-        </p:nvSpPr>
-        <p:spPr>
-          <a:xfrm>
-            <a:off x="0" y="5253203"/>
-            <a:ext cx="12192000" cy="707886"/>
-          </a:xfrm>
-          <a:prstGeom prst="rect">
-            <a:avLst/>
-          </a:prstGeom>
-          <a:noFill/>
-        </p:spPr>
-        <p:txBody>
-          <a:bodyPr wrap="square" rtlCol="0">
-            <a:spAutoFit/>
-          </a:bodyPr>
-          <a:lstStyle/>
-          <a:p>
-            <a:pPr algn="ctr"/>
-            <a:r>
-              <a:rPr lang="en-US" sz="4000" b="1" dirty="0">
-                <a:solidFill>
-                  <a:srgbClr val="660033"/>
-                </a:solidFill>
-                <a:latin typeface="Microsoft JhengHei" panose="020B0604030504040204" pitchFamily="34" charset="-120"/>
-                <a:ea typeface="Microsoft JhengHei" panose="020B0604030504040204" pitchFamily="34" charset="-120"/>
-              </a:rPr>
-              <a:t>( </a:t>
-            </a:r>
-            <a:r>
-              <a:rPr lang="zh-CN" altLang="en-US" sz="4000" b="1" dirty="0">
-                <a:solidFill>
-                  <a:srgbClr val="660033"/>
-                </a:solidFill>
-                <a:latin typeface="Microsoft JhengHei" panose="020B0604030504040204" pitchFamily="34" charset="-120"/>
-                <a:ea typeface="Microsoft JhengHei" panose="020B0604030504040204" pitchFamily="34" charset="-120"/>
-              </a:rPr>
-              <a:t>副歌 </a:t>
-            </a:r>
-            <a:r>
-              <a:rPr lang="en-US" altLang="zh-CN" sz="4000" b="1" dirty="0">
-                <a:solidFill>
-                  <a:srgbClr val="660033"/>
-                </a:solidFill>
-                <a:latin typeface="Microsoft JhengHei" panose="020B0604030504040204" pitchFamily="34" charset="-120"/>
-                <a:ea typeface="Microsoft JhengHei" panose="020B0604030504040204" pitchFamily="34" charset="-120"/>
-              </a:rPr>
-              <a:t>2</a:t>
-            </a:r>
-            <a:r>
-              <a:rPr lang="en-US" sz="4000" b="1" dirty="0">
-                <a:solidFill>
-                  <a:srgbClr val="660033"/>
-                </a:solidFill>
-                <a:latin typeface="Microsoft JhengHei" panose="020B0604030504040204" pitchFamily="34" charset="-120"/>
-                <a:ea typeface="Microsoft JhengHei" panose="020B0604030504040204" pitchFamily="34" charset="-120"/>
-              </a:rPr>
-              <a:t> ) ( 2</a:t>
-            </a:r>
-            <a:r>
-              <a:rPr lang="zh-CN" altLang="en-US" sz="4000" b="1" dirty="0">
-                <a:solidFill>
-                  <a:srgbClr val="660033"/>
-                </a:solidFill>
-                <a:latin typeface="Microsoft JhengHei" panose="020B0604030504040204" pitchFamily="34" charset="-120"/>
-                <a:ea typeface="Microsoft JhengHei" panose="020B0604030504040204" pitchFamily="34" charset="-120"/>
-              </a:rPr>
-              <a:t>次</a:t>
-            </a:r>
-            <a:r>
-              <a:rPr lang="en-US" sz="4000" b="1" dirty="0">
-                <a:solidFill>
-                  <a:srgbClr val="660033"/>
-                </a:solidFill>
-                <a:latin typeface="Microsoft JhengHei" panose="020B0604030504040204" pitchFamily="34" charset="-120"/>
-                <a:ea typeface="Microsoft JhengHei" panose="020B0604030504040204" pitchFamily="34" charset="-120"/>
-              </a:rPr>
-              <a:t> )</a:t>
-            </a:r>
-            <a:endParaRPr lang="vi-VN" sz="4000" b="1" dirty="0">
-              <a:solidFill>
-                <a:srgbClr val="660033"/>
-              </a:solidFill>
-              <a:ea typeface="Microsoft JhengHei" panose="020B0604030504040204" pitchFamily="34" charset="-120"/>
-            </a:endParaRPr>
-          </a:p>
-        </p:txBody>
-      </p:sp>
-    </p:spTree>
-    <p:extLst>
-      <p:ext uri="{BB962C8B-B14F-4D97-AF65-F5344CB8AC3E}">
-        <p14:creationId xmlns:p14="http://schemas.microsoft.com/office/powerpoint/2010/main" val="1530253755"/>
-      </p:ext>
-    </p:extLst>
-  </p:cSld>
-  <p:clrMapOvr>
-    <a:masterClrMapping/>
-  </p:clrMapOvr>
-</p:sld>
-</file>
-
 <file path=ppt/slides/slide2.xml><?xml version="1.0" encoding="utf-8"?>
 <p:sld xmlns:a="http://schemas.openxmlformats.org/drawingml/2006/main" xmlns:r="http://schemas.openxmlformats.org/officeDocument/2006/relationships" xmlns:p="http://schemas.openxmlformats.org/presentationml/2006/main">
   <p:cSld>
@@ -3929,7 +3566,7 @@
                 <a:latin typeface="Microsoft JhengHei" pitchFamily="34" charset="-120"/>
                 <a:ea typeface="Microsoft JhengHei" pitchFamily="34" charset="-120"/>
               </a:rPr>
-              <a:t>因為祂是萬王之王</a:t>
+              <a:t>萬膝要跪拜  萬口要承認</a:t>
             </a:r>
             <a:endParaRPr lang="en-US" altLang="zh-TW" sz="6400" b="1" dirty="0">
               <a:solidFill>
@@ -3951,7 +3588,7 @@
                 <a:latin typeface="Microsoft JhengHei" pitchFamily="34" charset="-120"/>
                 <a:ea typeface="Microsoft JhengHei" pitchFamily="34" charset="-120"/>
               </a:rPr>
-              <a:t>因為祂是萬主之主</a:t>
+              <a:t>耶穌基督祂是主</a:t>
             </a:r>
             <a:endParaRPr lang="en-US" altLang="zh-TW" sz="6400" b="1" dirty="0">
               <a:solidFill>
@@ -3971,8 +3608,8 @@
         </p:nvSpPr>
         <p:spPr>
           <a:xfrm>
-            <a:off x="0" y="5342585"/>
-            <a:ext cx="12192000" cy="646331"/>
+            <a:off x="0" y="5253203"/>
+            <a:ext cx="12192000" cy="707886"/>
           </a:xfrm>
           <a:prstGeom prst="rect">
             <a:avLst/>
@@ -3987,54 +3624,59 @@
           <a:p>
             <a:pPr algn="ctr"/>
             <a:r>
-              <a:rPr lang="en-US" sz="3600" b="1" dirty="0">
+              <a:rPr lang="en-US" sz="4000" b="1" dirty="0">
                 <a:solidFill>
                   <a:srgbClr val="660033"/>
                 </a:solidFill>
-                <a:effectLst/>
                 <a:latin typeface="Microsoft JhengHei" panose="020B0604030504040204" pitchFamily="34" charset="-120"/>
                 <a:ea typeface="Microsoft JhengHei" panose="020B0604030504040204" pitchFamily="34" charset="-120"/>
               </a:rPr>
               <a:t>( </a:t>
             </a:r>
             <a:r>
-              <a:rPr lang="zh-CN" altLang="en-US" sz="3600" b="1" dirty="0">
+              <a:rPr lang="zh-CN" altLang="en-US" sz="4000" b="1" dirty="0">
                 <a:solidFill>
                   <a:srgbClr val="660033"/>
                 </a:solidFill>
-                <a:effectLst/>
                 <a:latin typeface="Microsoft JhengHei" panose="020B0604030504040204" pitchFamily="34" charset="-120"/>
                 <a:ea typeface="Microsoft JhengHei" panose="020B0604030504040204" pitchFamily="34" charset="-120"/>
               </a:rPr>
-              <a:t>正歌 </a:t>
-            </a:r>
-            <a:r>
-              <a:rPr lang="en-US" altLang="zh-CN" sz="3600" b="1" dirty="0">
+              <a:t>副歌</a:t>
+            </a:r>
+            <a:r>
+              <a:rPr lang="en-US" sz="4000" b="1" dirty="0">
                 <a:solidFill>
                   <a:srgbClr val="660033"/>
                 </a:solidFill>
-                <a:effectLst/>
                 <a:latin typeface="Microsoft JhengHei" panose="020B0604030504040204" pitchFamily="34" charset="-120"/>
                 <a:ea typeface="Microsoft JhengHei" panose="020B0604030504040204" pitchFamily="34" charset="-120"/>
               </a:rPr>
-              <a:t>1</a:t>
-            </a:r>
-            <a:r>
-              <a:rPr lang="en-US" sz="3600" b="1" dirty="0">
+              <a:t> ) ( 2</a:t>
+            </a:r>
+            <a:r>
+              <a:rPr lang="zh-CN" altLang="en-US" sz="4000" b="1" dirty="0">
                 <a:solidFill>
                   <a:srgbClr val="660033"/>
                 </a:solidFill>
-                <a:effectLst/>
+                <a:latin typeface="Microsoft JhengHei" panose="020B0604030504040204" pitchFamily="34" charset="-120"/>
+                <a:ea typeface="Microsoft JhengHei" panose="020B0604030504040204" pitchFamily="34" charset="-120"/>
+              </a:rPr>
+              <a:t>次</a:t>
+            </a:r>
+            <a:r>
+              <a:rPr lang="en-US" sz="4000" b="1" dirty="0">
+                <a:solidFill>
+                  <a:srgbClr val="660033"/>
+                </a:solidFill>
                 <a:latin typeface="Microsoft JhengHei" panose="020B0604030504040204" pitchFamily="34" charset="-120"/>
                 <a:ea typeface="Microsoft JhengHei" panose="020B0604030504040204" pitchFamily="34" charset="-120"/>
               </a:rPr>
               <a:t> )</a:t>
             </a:r>
-            <a:endParaRPr lang="vi-VN" sz="3600" b="1" dirty="0">
+            <a:endParaRPr lang="vi-VN" sz="4000" b="1" dirty="0">
               <a:solidFill>
                 <a:srgbClr val="660033"/>
               </a:solidFill>
-              <a:effectLst/>
               <a:ea typeface="Microsoft JhengHei" panose="020B0604030504040204" pitchFamily="34" charset="-120"/>
             </a:endParaRPr>
           </a:p>
@@ -4043,7 +3685,7 @@
     </p:spTree>
     <p:extLst>
       <p:ext uri="{BB962C8B-B14F-4D97-AF65-F5344CB8AC3E}">
-        <p14:creationId xmlns:p14="http://schemas.microsoft.com/office/powerpoint/2010/main" val="1034904065"/>
+        <p14:creationId xmlns:p14="http://schemas.microsoft.com/office/powerpoint/2010/main" val="3373172481"/>
       </p:ext>
     </p:extLst>
   </p:cSld>
@@ -4103,7 +3745,7 @@
                 <a:latin typeface="Microsoft JhengHei" pitchFamily="34" charset="-120"/>
                 <a:ea typeface="Microsoft JhengHei" pitchFamily="34" charset="-120"/>
               </a:rPr>
-              <a:t>唯有祂從死裡復活</a:t>
+              <a:t>高唱榮耀  哈利路亞</a:t>
             </a:r>
             <a:endParaRPr lang="en-US" altLang="zh-TW" sz="6400" b="1" dirty="0">
               <a:solidFill>
@@ -4125,7 +3767,7 @@
                 <a:latin typeface="Microsoft JhengHei" pitchFamily="34" charset="-120"/>
                 <a:ea typeface="Microsoft JhengHei" pitchFamily="34" charset="-120"/>
               </a:rPr>
-              <a:t>我要敬拜祂</a:t>
+              <a:t>歡呼榮耀  哈利路亞</a:t>
             </a:r>
             <a:endParaRPr lang="en-US" altLang="zh-TW" sz="6400" b="1" dirty="0">
               <a:solidFill>
@@ -4165,7 +3807,6 @@
                 <a:solidFill>
                   <a:srgbClr val="660033"/>
                 </a:solidFill>
-                <a:effectLst/>
                 <a:latin typeface="Microsoft JhengHei" panose="020B0604030504040204" pitchFamily="34" charset="-120"/>
                 <a:ea typeface="Microsoft JhengHei" panose="020B0604030504040204" pitchFamily="34" charset="-120"/>
               </a:rPr>
@@ -4176,7 +3817,6 @@
                 <a:solidFill>
                   <a:srgbClr val="660033"/>
                 </a:solidFill>
-                <a:effectLst/>
                 <a:latin typeface="Microsoft JhengHei" panose="020B0604030504040204" pitchFamily="34" charset="-120"/>
                 <a:ea typeface="Microsoft JhengHei" panose="020B0604030504040204" pitchFamily="34" charset="-120"/>
               </a:rPr>
@@ -4187,18 +3827,16 @@
                 <a:solidFill>
                   <a:srgbClr val="660033"/>
                 </a:solidFill>
-                <a:effectLst/>
                 <a:latin typeface="Microsoft JhengHei" panose="020B0604030504040204" pitchFamily="34" charset="-120"/>
                 <a:ea typeface="Microsoft JhengHei" panose="020B0604030504040204" pitchFamily="34" charset="-120"/>
               </a:rPr>
-              <a:t>1</a:t>
+              <a:t>2</a:t>
             </a:r>
             <a:r>
               <a:rPr lang="en-US" sz="3600" b="1" dirty="0">
                 <a:solidFill>
                   <a:srgbClr val="660033"/>
                 </a:solidFill>
-                <a:effectLst/>
                 <a:latin typeface="Microsoft JhengHei" panose="020B0604030504040204" pitchFamily="34" charset="-120"/>
                 <a:ea typeface="Microsoft JhengHei" panose="020B0604030504040204" pitchFamily="34" charset="-120"/>
               </a:rPr>
@@ -4208,7 +3846,7 @@
               <a:solidFill>
                 <a:srgbClr val="660033"/>
               </a:solidFill>
-              <a:effectLst/>
+              <a:latin typeface="Microsoft JhengHei" panose="020B0604030504040204" pitchFamily="34" charset="-120"/>
               <a:ea typeface="Microsoft JhengHei" panose="020B0604030504040204" pitchFamily="34" charset="-120"/>
             </a:endParaRPr>
           </a:p>
@@ -4217,7 +3855,7 @@
     </p:spTree>
     <p:extLst>
       <p:ext uri="{BB962C8B-B14F-4D97-AF65-F5344CB8AC3E}">
-        <p14:creationId xmlns:p14="http://schemas.microsoft.com/office/powerpoint/2010/main" val="2809669929"/>
+        <p14:creationId xmlns:p14="http://schemas.microsoft.com/office/powerpoint/2010/main" val="796804153"/>
       </p:ext>
     </p:extLst>
   </p:cSld>
@@ -4277,7 +3915,7 @@
                 <a:latin typeface="Microsoft JhengHei" pitchFamily="34" charset="-120"/>
                 <a:ea typeface="Microsoft JhengHei" pitchFamily="34" charset="-120"/>
               </a:rPr>
-              <a:t>萬膝要跪拜  萬口要承認</a:t>
+              <a:t>祂是我的主我的王</a:t>
             </a:r>
             <a:endParaRPr lang="en-US" altLang="zh-TW" sz="6400" b="1" dirty="0">
               <a:solidFill>
@@ -4299,7 +3937,7 @@
                 <a:latin typeface="Microsoft JhengHei" pitchFamily="34" charset="-120"/>
                 <a:ea typeface="Microsoft JhengHei" pitchFamily="34" charset="-120"/>
               </a:rPr>
-              <a:t>耶穌基督祂是主</a:t>
+              <a:t>我要敬拜祂</a:t>
             </a:r>
             <a:endParaRPr lang="en-US" altLang="zh-TW" sz="6400" b="1" dirty="0">
               <a:solidFill>
@@ -4319,8 +3957,8 @@
         </p:nvSpPr>
         <p:spPr>
           <a:xfrm>
-            <a:off x="0" y="5253203"/>
-            <a:ext cx="12192000" cy="707886"/>
+            <a:off x="0" y="5342585"/>
+            <a:ext cx="12192000" cy="646331"/>
           </a:xfrm>
           <a:prstGeom prst="rect">
             <a:avLst/>
@@ -4335,7 +3973,7 @@
           <a:p>
             <a:pPr algn="ctr"/>
             <a:r>
-              <a:rPr lang="en-US" sz="4000" b="1" dirty="0">
+              <a:rPr lang="en-US" sz="3600" b="1" dirty="0">
                 <a:solidFill>
                   <a:srgbClr val="660033"/>
                 </a:solidFill>
@@ -4345,37 +3983,27 @@
               <a:t>( </a:t>
             </a:r>
             <a:r>
-              <a:rPr lang="zh-CN" altLang="en-US" sz="4000" b="1" dirty="0">
+              <a:rPr lang="zh-CN" altLang="en-US" sz="3600" b="1" dirty="0">
                 <a:solidFill>
                   <a:srgbClr val="660033"/>
                 </a:solidFill>
                 <a:latin typeface="Microsoft JhengHei" panose="020B0604030504040204" pitchFamily="34" charset="-120"/>
                 <a:ea typeface="Microsoft JhengHei" panose="020B0604030504040204" pitchFamily="34" charset="-120"/>
               </a:rPr>
-              <a:t>副歌</a:t>
-            </a:r>
-            <a:r>
-              <a:rPr lang="en-US" sz="4000" b="1" dirty="0">
+              <a:t>正歌 </a:t>
+            </a:r>
+            <a:r>
+              <a:rPr lang="en-US" altLang="zh-CN" sz="3600" b="1" dirty="0">
                 <a:solidFill>
                   <a:srgbClr val="660033"/>
                 </a:solidFill>
                 <a:latin typeface="Microsoft JhengHei" panose="020B0604030504040204" pitchFamily="34" charset="-120"/>
                 <a:ea typeface="Microsoft JhengHei" panose="020B0604030504040204" pitchFamily="34" charset="-120"/>
               </a:rPr>
-              <a:t> ) ( 2</a:t>
-            </a:r>
-            <a:r>
-              <a:rPr lang="zh-CN" altLang="en-US" sz="4000" b="1" dirty="0">
-                <a:solidFill>
-                  <a:srgbClr val="660033"/>
-                </a:solidFill>
-                <a:latin typeface="Microsoft JhengHei" panose="020B0604030504040204" pitchFamily="34" charset="-120"/>
-                <a:ea typeface="Microsoft JhengHei" panose="020B0604030504040204" pitchFamily="34" charset="-120"/>
-              </a:rPr>
-              <a:t>次</a:t>
-            </a:r>
-            <a:r>
-              <a:rPr lang="en-US" sz="4000" b="1" dirty="0">
+              <a:t>2</a:t>
+            </a:r>
+            <a:r>
+              <a:rPr lang="en-US" sz="3600" b="1" dirty="0">
                 <a:solidFill>
                   <a:srgbClr val="660033"/>
                 </a:solidFill>
@@ -4384,10 +4012,11 @@
               </a:rPr>
               <a:t> )</a:t>
             </a:r>
-            <a:endParaRPr lang="vi-VN" sz="4000" b="1" dirty="0">
+            <a:endParaRPr lang="vi-VN" sz="3600" b="1" dirty="0">
               <a:solidFill>
                 <a:srgbClr val="660033"/>
               </a:solidFill>
+              <a:latin typeface="Microsoft JhengHei" panose="020B0604030504040204" pitchFamily="34" charset="-120"/>
               <a:ea typeface="Microsoft JhengHei" panose="020B0604030504040204" pitchFamily="34" charset="-120"/>
             </a:endParaRPr>
           </a:p>
@@ -4396,7 +4025,7 @@
     </p:spTree>
     <p:extLst>
       <p:ext uri="{BB962C8B-B14F-4D97-AF65-F5344CB8AC3E}">
-        <p14:creationId xmlns:p14="http://schemas.microsoft.com/office/powerpoint/2010/main" val="3373172481"/>
+        <p14:creationId xmlns:p14="http://schemas.microsoft.com/office/powerpoint/2010/main" val="587962328"/>
       </p:ext>
     </p:extLst>
   </p:cSld>
@@ -4456,7 +4085,7 @@
                 <a:latin typeface="Microsoft JhengHei" pitchFamily="34" charset="-120"/>
                 <a:ea typeface="Microsoft JhengHei" pitchFamily="34" charset="-120"/>
               </a:rPr>
-              <a:t>高唱榮耀  哈利路亞</a:t>
+              <a:t>哈利路亞  哈利路亞</a:t>
             </a:r>
             <a:endParaRPr lang="en-US" altLang="zh-TW" sz="6400" b="1" dirty="0">
               <a:solidFill>
@@ -4478,7 +4107,7 @@
                 <a:latin typeface="Microsoft JhengHei" pitchFamily="34" charset="-120"/>
                 <a:ea typeface="Microsoft JhengHei" pitchFamily="34" charset="-120"/>
               </a:rPr>
-              <a:t>歡呼榮耀  哈利路亞</a:t>
+              <a:t>耶穌基督祂是主</a:t>
             </a:r>
             <a:endParaRPr lang="en-US" altLang="zh-TW" sz="6400" b="1" dirty="0">
               <a:solidFill>
@@ -4492,14 +4121,14 @@
       </p:sp>
       <p:sp>
         <p:nvSpPr>
-          <p:cNvPr id="3" name="TextBox 2"/>
+          <p:cNvPr id="4" name="TextBox 3"/>
           <p:cNvSpPr txBox="1"/>
           <p:nvPr/>
         </p:nvSpPr>
         <p:spPr>
           <a:xfrm>
-            <a:off x="0" y="5342585"/>
-            <a:ext cx="12192000" cy="646331"/>
+            <a:off x="0" y="5253203"/>
+            <a:ext cx="12192000" cy="707886"/>
           </a:xfrm>
           <a:prstGeom prst="rect">
             <a:avLst/>
@@ -4514,7 +4143,7 @@
           <a:p>
             <a:pPr algn="ctr"/>
             <a:r>
-              <a:rPr lang="en-US" sz="3600" b="1" dirty="0">
+              <a:rPr lang="en-US" sz="4000" b="1" dirty="0">
                 <a:solidFill>
                   <a:srgbClr val="660033"/>
                 </a:solidFill>
@@ -4524,17 +4153,17 @@
               <a:t>( </a:t>
             </a:r>
             <a:r>
-              <a:rPr lang="zh-CN" altLang="en-US" sz="3600" b="1" dirty="0">
+              <a:rPr lang="zh-CN" altLang="en-US" sz="4000" b="1" dirty="0">
                 <a:solidFill>
                   <a:srgbClr val="660033"/>
                 </a:solidFill>
                 <a:latin typeface="Microsoft JhengHei" panose="020B0604030504040204" pitchFamily="34" charset="-120"/>
                 <a:ea typeface="Microsoft JhengHei" panose="020B0604030504040204" pitchFamily="34" charset="-120"/>
               </a:rPr>
-              <a:t>正歌 </a:t>
-            </a:r>
-            <a:r>
-              <a:rPr lang="en-US" altLang="zh-CN" sz="3600" b="1" dirty="0">
+              <a:t>副歌 </a:t>
+            </a:r>
+            <a:r>
+              <a:rPr lang="en-US" altLang="zh-CN" sz="4000" b="1" dirty="0">
                 <a:solidFill>
                   <a:srgbClr val="660033"/>
                 </a:solidFill>
@@ -4544,7 +4173,27 @@
               <a:t>2</a:t>
             </a:r>
             <a:r>
-              <a:rPr lang="en-US" sz="3600" b="1" dirty="0">
+              <a:rPr lang="en-US" sz="4000" b="1" dirty="0">
+                <a:solidFill>
+                  <a:srgbClr val="660033"/>
+                </a:solidFill>
+                <a:latin typeface="Microsoft JhengHei" panose="020B0604030504040204" pitchFamily="34" charset="-120"/>
+                <a:ea typeface="Microsoft JhengHei" panose="020B0604030504040204" pitchFamily="34" charset="-120"/>
+              </a:rPr>
+              <a:t> ) ( 2</a:t>
+            </a:r>
+            <a:r>
+              <a:rPr lang="zh-CN" altLang="en-US" sz="4000" b="1" dirty="0">
+                <a:solidFill>
+                  <a:srgbClr val="660033"/>
+                </a:solidFill>
+                <a:latin typeface="Microsoft JhengHei" panose="020B0604030504040204" pitchFamily="34" charset="-120"/>
+                <a:ea typeface="Microsoft JhengHei" panose="020B0604030504040204" pitchFamily="34" charset="-120"/>
+              </a:rPr>
+              <a:t>次</a:t>
+            </a:r>
+            <a:r>
+              <a:rPr lang="en-US" sz="4000" b="1" dirty="0">
                 <a:solidFill>
                   <a:srgbClr val="660033"/>
                 </a:solidFill>
@@ -4553,11 +4202,10 @@
               </a:rPr>
               <a:t> )</a:t>
             </a:r>
-            <a:endParaRPr lang="vi-VN" sz="3600" b="1" dirty="0">
+            <a:endParaRPr lang="vi-VN" sz="4000" b="1" dirty="0">
               <a:solidFill>
                 <a:srgbClr val="660033"/>
               </a:solidFill>
-              <a:latin typeface="Microsoft JhengHei" panose="020B0604030504040204" pitchFamily="34" charset="-120"/>
               <a:ea typeface="Microsoft JhengHei" panose="020B0604030504040204" pitchFamily="34" charset="-120"/>
             </a:endParaRPr>
           </a:p>
@@ -4566,347 +4214,7 @@
     </p:spTree>
     <p:extLst>
       <p:ext uri="{BB962C8B-B14F-4D97-AF65-F5344CB8AC3E}">
-        <p14:creationId xmlns:p14="http://schemas.microsoft.com/office/powerpoint/2010/main" val="796804153"/>
-      </p:ext>
-    </p:extLst>
-  </p:cSld>
-  <p:clrMapOvr>
-    <a:masterClrMapping/>
-  </p:clrMapOvr>
-</p:sld>
-</file>
-
-<file path=ppt/slides/slide8.xml><?xml version="1.0" encoding="utf-8"?>
-<p:sld xmlns:a="http://schemas.openxmlformats.org/drawingml/2006/main" xmlns:r="http://schemas.openxmlformats.org/officeDocument/2006/relationships" xmlns:p="http://schemas.openxmlformats.org/presentationml/2006/main">
-  <p:cSld>
-    <p:spTree>
-      <p:nvGrpSpPr>
-        <p:cNvPr id="1" name=""/>
-        <p:cNvGrpSpPr/>
-        <p:nvPr/>
-      </p:nvGrpSpPr>
-      <p:grpSpPr>
-        <a:xfrm>
-          <a:off x="0" y="0"/>
-          <a:ext cx="0" cy="0"/>
-          <a:chOff x="0" y="0"/>
-          <a:chExt cx="0" cy="0"/>
-        </a:xfrm>
-      </p:grpSpPr>
-      <p:sp>
-        <p:nvSpPr>
-          <p:cNvPr id="5" name="內容版面配置區 4"/>
-          <p:cNvSpPr>
-            <a:spLocks noGrp="1"/>
-          </p:cNvSpPr>
-          <p:nvPr>
-            <p:ph idx="1"/>
-          </p:nvPr>
-        </p:nvSpPr>
-        <p:spPr>
-          <a:xfrm>
-            <a:off x="0" y="2084853"/>
-            <a:ext cx="12192000" cy="2404863"/>
-          </a:xfrm>
-        </p:spPr>
-        <p:txBody>
-          <a:bodyPr anchor="ctr">
-            <a:normAutofit/>
-          </a:bodyPr>
-          <a:lstStyle/>
-          <a:p>
-            <a:pPr algn="ctr">
-              <a:buNone/>
-            </a:pPr>
-            <a:r>
-              <a:rPr lang="zh-TW" altLang="en-US" sz="6400" b="1" dirty="0">
-                <a:solidFill>
-                  <a:srgbClr val="660033"/>
-                </a:solidFill>
-                <a:latin typeface="Microsoft JhengHei" pitchFamily="34" charset="-120"/>
-                <a:ea typeface="Microsoft JhengHei" pitchFamily="34" charset="-120"/>
-              </a:rPr>
-              <a:t>祂是我的主我的王</a:t>
-            </a:r>
-            <a:endParaRPr lang="en-US" altLang="zh-TW" sz="6400" b="1" dirty="0">
-              <a:solidFill>
-                <a:srgbClr val="660033"/>
-              </a:solidFill>
-              <a:latin typeface="Microsoft JhengHei" pitchFamily="34" charset="-120"/>
-              <a:ea typeface="Microsoft JhengHei" pitchFamily="34" charset="-120"/>
-            </a:endParaRPr>
-          </a:p>
-          <a:p>
-            <a:pPr algn="ctr">
-              <a:buNone/>
-            </a:pPr>
-            <a:r>
-              <a:rPr lang="zh-TW" altLang="en-US" sz="6400" b="1" dirty="0">
-                <a:solidFill>
-                  <a:srgbClr val="660033"/>
-                </a:solidFill>
-                <a:latin typeface="Microsoft JhengHei" pitchFamily="34" charset="-120"/>
-                <a:ea typeface="Microsoft JhengHei" pitchFamily="34" charset="-120"/>
-              </a:rPr>
-              <a:t>我要敬拜祂</a:t>
-            </a:r>
-            <a:endParaRPr lang="en-US" altLang="zh-TW" sz="6400" b="1" dirty="0">
-              <a:solidFill>
-                <a:srgbClr val="660033"/>
-              </a:solidFill>
-              <a:latin typeface="Microsoft JhengHei" pitchFamily="34" charset="-120"/>
-              <a:ea typeface="Microsoft JhengHei" pitchFamily="34" charset="-120"/>
-            </a:endParaRPr>
-          </a:p>
-        </p:txBody>
-      </p:sp>
-      <p:sp>
-        <p:nvSpPr>
-          <p:cNvPr id="3" name="TextBox 2"/>
-          <p:cNvSpPr txBox="1"/>
-          <p:nvPr/>
-        </p:nvSpPr>
-        <p:spPr>
-          <a:xfrm>
-            <a:off x="0" y="5342585"/>
-            <a:ext cx="12192000" cy="646331"/>
-          </a:xfrm>
-          <a:prstGeom prst="rect">
-            <a:avLst/>
-          </a:prstGeom>
-          <a:noFill/>
-        </p:spPr>
-        <p:txBody>
-          <a:bodyPr wrap="square" rtlCol="0">
-            <a:spAutoFit/>
-          </a:bodyPr>
-          <a:lstStyle/>
-          <a:p>
-            <a:pPr algn="ctr"/>
-            <a:r>
-              <a:rPr lang="en-US" sz="3600" b="1" dirty="0">
-                <a:solidFill>
-                  <a:srgbClr val="660033"/>
-                </a:solidFill>
-                <a:latin typeface="Microsoft JhengHei" panose="020B0604030504040204" pitchFamily="34" charset="-120"/>
-                <a:ea typeface="Microsoft JhengHei" panose="020B0604030504040204" pitchFamily="34" charset="-120"/>
-              </a:rPr>
-              <a:t>( </a:t>
-            </a:r>
-            <a:r>
-              <a:rPr lang="zh-CN" altLang="en-US" sz="3600" b="1" dirty="0">
-                <a:solidFill>
-                  <a:srgbClr val="660033"/>
-                </a:solidFill>
-                <a:latin typeface="Microsoft JhengHei" panose="020B0604030504040204" pitchFamily="34" charset="-120"/>
-                <a:ea typeface="Microsoft JhengHei" panose="020B0604030504040204" pitchFamily="34" charset="-120"/>
-              </a:rPr>
-              <a:t>正歌 </a:t>
-            </a:r>
-            <a:r>
-              <a:rPr lang="en-US" altLang="zh-CN" sz="3600" b="1" dirty="0">
-                <a:solidFill>
-                  <a:srgbClr val="660033"/>
-                </a:solidFill>
-                <a:latin typeface="Microsoft JhengHei" panose="020B0604030504040204" pitchFamily="34" charset="-120"/>
-                <a:ea typeface="Microsoft JhengHei" panose="020B0604030504040204" pitchFamily="34" charset="-120"/>
-              </a:rPr>
-              <a:t>2</a:t>
-            </a:r>
-            <a:r>
-              <a:rPr lang="en-US" sz="3600" b="1" dirty="0">
-                <a:solidFill>
-                  <a:srgbClr val="660033"/>
-                </a:solidFill>
-                <a:latin typeface="Microsoft JhengHei" panose="020B0604030504040204" pitchFamily="34" charset="-120"/>
-                <a:ea typeface="Microsoft JhengHei" panose="020B0604030504040204" pitchFamily="34" charset="-120"/>
-              </a:rPr>
-              <a:t> )</a:t>
-            </a:r>
-            <a:endParaRPr lang="vi-VN" sz="3600" b="1" dirty="0">
-              <a:solidFill>
-                <a:srgbClr val="660033"/>
-              </a:solidFill>
-              <a:latin typeface="Microsoft JhengHei" panose="020B0604030504040204" pitchFamily="34" charset="-120"/>
-              <a:ea typeface="Microsoft JhengHei" panose="020B0604030504040204" pitchFamily="34" charset="-120"/>
-            </a:endParaRPr>
-          </a:p>
-        </p:txBody>
-      </p:sp>
-    </p:spTree>
-    <p:extLst>
-      <p:ext uri="{BB962C8B-B14F-4D97-AF65-F5344CB8AC3E}">
-        <p14:creationId xmlns:p14="http://schemas.microsoft.com/office/powerpoint/2010/main" val="587962328"/>
-      </p:ext>
-    </p:extLst>
-  </p:cSld>
-  <p:clrMapOvr>
-    <a:masterClrMapping/>
-  </p:clrMapOvr>
-</p:sld>
-</file>
-
-<file path=ppt/slides/slide9.xml><?xml version="1.0" encoding="utf-8"?>
-<p:sld xmlns:a="http://schemas.openxmlformats.org/drawingml/2006/main" xmlns:r="http://schemas.openxmlformats.org/officeDocument/2006/relationships" xmlns:p="http://schemas.openxmlformats.org/presentationml/2006/main">
-  <p:cSld>
-    <p:spTree>
-      <p:nvGrpSpPr>
-        <p:cNvPr id="1" name=""/>
-        <p:cNvGrpSpPr/>
-        <p:nvPr/>
-      </p:nvGrpSpPr>
-      <p:grpSpPr>
-        <a:xfrm>
-          <a:off x="0" y="0"/>
-          <a:ext cx="0" cy="0"/>
-          <a:chOff x="0" y="0"/>
-          <a:chExt cx="0" cy="0"/>
-        </a:xfrm>
-      </p:grpSpPr>
-      <p:sp>
-        <p:nvSpPr>
-          <p:cNvPr id="5" name="內容版面配置區 4"/>
-          <p:cNvSpPr>
-            <a:spLocks noGrp="1"/>
-          </p:cNvSpPr>
-          <p:nvPr>
-            <p:ph idx="1"/>
-          </p:nvPr>
-        </p:nvSpPr>
-        <p:spPr>
-          <a:xfrm>
-            <a:off x="0" y="2084853"/>
-            <a:ext cx="12192000" cy="2404863"/>
-          </a:xfrm>
-        </p:spPr>
-        <p:txBody>
-          <a:bodyPr anchor="ctr">
-            <a:normAutofit/>
-          </a:bodyPr>
-          <a:lstStyle/>
-          <a:p>
-            <a:pPr algn="ctr">
-              <a:buNone/>
-            </a:pPr>
-            <a:r>
-              <a:rPr lang="zh-TW" altLang="en-US" sz="6400" b="1" dirty="0">
-                <a:solidFill>
-                  <a:srgbClr val="660033"/>
-                </a:solidFill>
-                <a:latin typeface="Microsoft JhengHei" pitchFamily="34" charset="-120"/>
-                <a:ea typeface="Microsoft JhengHei" pitchFamily="34" charset="-120"/>
-              </a:rPr>
-              <a:t>高唱榮耀  哈利路亞</a:t>
-            </a:r>
-            <a:endParaRPr lang="en-US" altLang="zh-TW" sz="6400" b="1" dirty="0">
-              <a:solidFill>
-                <a:srgbClr val="660033"/>
-              </a:solidFill>
-              <a:latin typeface="Microsoft JhengHei" pitchFamily="34" charset="-120"/>
-              <a:ea typeface="Microsoft JhengHei" pitchFamily="34" charset="-120"/>
-            </a:endParaRPr>
-          </a:p>
-          <a:p>
-            <a:pPr algn="ctr">
-              <a:buNone/>
-            </a:pPr>
-            <a:r>
-              <a:rPr lang="zh-TW" altLang="en-US" sz="6400" b="1" dirty="0">
-                <a:solidFill>
-                  <a:srgbClr val="660033"/>
-                </a:solidFill>
-                <a:latin typeface="Microsoft JhengHei" pitchFamily="34" charset="-120"/>
-                <a:ea typeface="Microsoft JhengHei" pitchFamily="34" charset="-120"/>
-              </a:rPr>
-              <a:t>歡呼榮耀  哈利路亞</a:t>
-            </a:r>
-            <a:endParaRPr lang="en-US" altLang="zh-TW" sz="6400" b="1" dirty="0">
-              <a:solidFill>
-                <a:srgbClr val="660033"/>
-              </a:solidFill>
-              <a:latin typeface="Microsoft JhengHei" pitchFamily="34" charset="-120"/>
-              <a:ea typeface="Microsoft JhengHei" pitchFamily="34" charset="-120"/>
-            </a:endParaRPr>
-          </a:p>
-        </p:txBody>
-      </p:sp>
-      <p:sp>
-        <p:nvSpPr>
-          <p:cNvPr id="3" name="TextBox 2"/>
-          <p:cNvSpPr txBox="1"/>
-          <p:nvPr/>
-        </p:nvSpPr>
-        <p:spPr>
-          <a:xfrm>
-            <a:off x="0" y="5342585"/>
-            <a:ext cx="12192000" cy="646331"/>
-          </a:xfrm>
-          <a:prstGeom prst="rect">
-            <a:avLst/>
-          </a:prstGeom>
-          <a:noFill/>
-        </p:spPr>
-        <p:txBody>
-          <a:bodyPr wrap="square" rtlCol="0">
-            <a:spAutoFit/>
-          </a:bodyPr>
-          <a:lstStyle/>
-          <a:p>
-            <a:pPr algn="ctr"/>
-            <a:r>
-              <a:rPr lang="en-US" sz="3600" b="1" dirty="0">
-                <a:solidFill>
-                  <a:srgbClr val="660033"/>
-                </a:solidFill>
-                <a:latin typeface="Microsoft JhengHei" panose="020B0604030504040204" pitchFamily="34" charset="-120"/>
-                <a:ea typeface="Microsoft JhengHei" panose="020B0604030504040204" pitchFamily="34" charset="-120"/>
-              </a:rPr>
-              <a:t>( </a:t>
-            </a:r>
-            <a:r>
-              <a:rPr lang="zh-CN" altLang="en-US" sz="3600" b="1" dirty="0">
-                <a:solidFill>
-                  <a:srgbClr val="660033"/>
-                </a:solidFill>
-                <a:latin typeface="Microsoft JhengHei" panose="020B0604030504040204" pitchFamily="34" charset="-120"/>
-                <a:ea typeface="Microsoft JhengHei" panose="020B0604030504040204" pitchFamily="34" charset="-120"/>
-              </a:rPr>
-              <a:t>正歌 </a:t>
-            </a:r>
-            <a:r>
-              <a:rPr lang="en-US" altLang="zh-CN" sz="3600" b="1" dirty="0">
-                <a:solidFill>
-                  <a:srgbClr val="660033"/>
-                </a:solidFill>
-                <a:latin typeface="Microsoft JhengHei" panose="020B0604030504040204" pitchFamily="34" charset="-120"/>
-                <a:ea typeface="Microsoft JhengHei" panose="020B0604030504040204" pitchFamily="34" charset="-120"/>
-              </a:rPr>
-              <a:t>2</a:t>
-            </a:r>
-            <a:r>
-              <a:rPr lang="en-US" sz="3600" b="1" dirty="0">
-                <a:solidFill>
-                  <a:srgbClr val="660033"/>
-                </a:solidFill>
-                <a:latin typeface="Microsoft JhengHei" panose="020B0604030504040204" pitchFamily="34" charset="-120"/>
-                <a:ea typeface="Microsoft JhengHei" panose="020B0604030504040204" pitchFamily="34" charset="-120"/>
-              </a:rPr>
-              <a:t> )</a:t>
-            </a:r>
-            <a:endParaRPr lang="vi-VN" sz="3600" b="1" dirty="0">
-              <a:solidFill>
-                <a:srgbClr val="660033"/>
-              </a:solidFill>
-              <a:latin typeface="Microsoft JhengHei" panose="020B0604030504040204" pitchFamily="34" charset="-120"/>
-              <a:ea typeface="Microsoft JhengHei" panose="020B0604030504040204" pitchFamily="34" charset="-120"/>
-            </a:endParaRPr>
-          </a:p>
-        </p:txBody>
-      </p:sp>
-    </p:spTree>
-    <p:extLst>
-      <p:ext uri="{BB962C8B-B14F-4D97-AF65-F5344CB8AC3E}">
-        <p14:creationId xmlns:p14="http://schemas.microsoft.com/office/powerpoint/2010/main" val="1386255573"/>
+        <p14:creationId xmlns:p14="http://schemas.microsoft.com/office/powerpoint/2010/main" val="1530253755"/>
       </p:ext>
     </p:extLst>
   </p:cSld>
